--- a/Decoherence.pptx
+++ b/Decoherence.pptx
@@ -5,18 +5,13 @@
     <p:sldMasterId id="2147483648" r:id="rId1"/>
   </p:sldMasterIdLst>
   <p:notesMasterIdLst>
-    <p:notesMasterId r:id="rId11"/>
+    <p:notesMasterId r:id="rId6"/>
   </p:notesMasterIdLst>
   <p:sldIdLst>
     <p:sldId id="263" r:id="rId2"/>
-    <p:sldId id="268" r:id="rId3"/>
-    <p:sldId id="277" r:id="rId4"/>
-    <p:sldId id="270" r:id="rId5"/>
-    <p:sldId id="271" r:id="rId6"/>
-    <p:sldId id="272" r:id="rId7"/>
-    <p:sldId id="273" r:id="rId8"/>
-    <p:sldId id="275" r:id="rId9"/>
-    <p:sldId id="278" r:id="rId10"/>
+    <p:sldId id="265" r:id="rId3"/>
+    <p:sldId id="266" r:id="rId4"/>
+    <p:sldId id="264" r:id="rId5"/>
   </p:sldIdLst>
   <p:sldSz cx="12192000" cy="6858000"/>
   <p:notesSz cx="6858000" cy="9144000"/>
@@ -205,7 +200,7 @@
           <a:p>
             <a:fld id="{AEE9B40D-369A-402D-9A24-2FE29612B8AB}" type="datetimeFigureOut">
               <a:rPr lang="en-GB" smtClean="0"/>
-              <a:t>16/07/2026</a:t>
+              <a:t>20/07/2026</a:t>
             </a:fld>
             <a:endParaRPr lang="en-GB"/>
           </a:p>
@@ -472,97 +467,6 @@
 </p:notesMaster>
 </file>
 
-<file path=ppt/notesSlides/notesSlide1.xml><?xml version="1.0" encoding="utf-8"?>
-<p:notes xmlns:a="http://schemas.openxmlformats.org/drawingml/2006/main" xmlns:r="http://schemas.openxmlformats.org/officeDocument/2006/relationships" xmlns:p="http://schemas.openxmlformats.org/presentationml/2006/main">
-  <p:cSld>
-    <p:spTree>
-      <p:nvGrpSpPr>
-        <p:cNvPr id="1" name=""/>
-        <p:cNvGrpSpPr/>
-        <p:nvPr/>
-      </p:nvGrpSpPr>
-      <p:grpSpPr>
-        <a:xfrm>
-          <a:off x="0" y="0"/>
-          <a:ext cx="0" cy="0"/>
-          <a:chOff x="0" y="0"/>
-          <a:chExt cx="0" cy="0"/>
-        </a:xfrm>
-      </p:grpSpPr>
-      <p:sp>
-        <p:nvSpPr>
-          <p:cNvPr id="2" name="Slide Image Placeholder 1"/>
-          <p:cNvSpPr>
-            <a:spLocks noGrp="1" noRot="1" noChangeAspect="1"/>
-          </p:cNvSpPr>
-          <p:nvPr>
-            <p:ph type="sldImg"/>
-          </p:nvPr>
-        </p:nvSpPr>
-        <p:spPr/>
-        <p:txBody>
-          <a:bodyPr/>
-          <a:lstStyle/>
-          <a:p>
-            <a:endParaRPr lang="en-VN"/>
-          </a:p>
-        </p:txBody>
-      </p:sp>
-      <p:sp>
-        <p:nvSpPr>
-          <p:cNvPr id="3" name="Notes Placeholder 2"/>
-          <p:cNvSpPr>
-            <a:spLocks noGrp="1"/>
-          </p:cNvSpPr>
-          <p:nvPr>
-            <p:ph type="body" idx="1"/>
-          </p:nvPr>
-        </p:nvSpPr>
-        <p:spPr/>
-        <p:txBody>
-          <a:bodyPr/>
-          <a:lstStyle/>
-          <a:p>
-            <a:endParaRPr lang="en-VN" dirty="0"/>
-          </a:p>
-        </p:txBody>
-      </p:sp>
-      <p:sp>
-        <p:nvSpPr>
-          <p:cNvPr id="4" name="Slide Number Placeholder 3"/>
-          <p:cNvSpPr>
-            <a:spLocks noGrp="1"/>
-          </p:cNvSpPr>
-          <p:nvPr>
-            <p:ph type="sldNum" sz="quarter" idx="5"/>
-          </p:nvPr>
-        </p:nvSpPr>
-        <p:spPr/>
-        <p:txBody>
-          <a:bodyPr/>
-          <a:lstStyle/>
-          <a:p>
-            <a:fld id="{14AB16DF-001F-49E5-B874-FF3F5D73B4BA}" type="slidenum">
-              <a:rPr lang="en-GB" smtClean="0"/>
-              <a:t>7</a:t>
-            </a:fld>
-            <a:endParaRPr lang="en-GB"/>
-          </a:p>
-        </p:txBody>
-      </p:sp>
-    </p:spTree>
-    <p:extLst>
-      <p:ext uri="{BB962C8B-B14F-4D97-AF65-F5344CB8AC3E}">
-        <p14:creationId xmlns:p14="http://schemas.microsoft.com/office/powerpoint/2010/main" val="2649734352"/>
-      </p:ext>
-    </p:extLst>
-  </p:cSld>
-  <p:clrMapOvr>
-    <a:masterClrMapping/>
-  </p:clrMapOvr>
-</p:notes>
-</file>
-
 <file path=ppt/slideLayouts/slideLayout1.xml><?xml version="1.0" encoding="utf-8"?>
 <p:sldLayout xmlns:a="http://schemas.openxmlformats.org/drawingml/2006/main" xmlns:r="http://schemas.openxmlformats.org/officeDocument/2006/relationships" xmlns:p="http://schemas.openxmlformats.org/presentationml/2006/main" type="title" preserve="1">
   <p:cSld name="Title Slide">
@@ -712,7 +616,7 @@
           <a:p>
             <a:fld id="{61CB208B-134F-A247-843F-FB0F3B432007}" type="datetimeFigureOut">
               <a:rPr lang="en-US" smtClean="0"/>
-              <a:t>7/16/26</a:t>
+              <a:t>7/24/26</a:t>
             </a:fld>
             <a:endParaRPr lang="en-US"/>
           </a:p>
@@ -912,7 +816,7 @@
           <a:p>
             <a:fld id="{61CB208B-134F-A247-843F-FB0F3B432007}" type="datetimeFigureOut">
               <a:rPr lang="en-US" smtClean="0"/>
-              <a:t>7/16/26</a:t>
+              <a:t>7/24/26</a:t>
             </a:fld>
             <a:endParaRPr lang="en-US"/>
           </a:p>
@@ -1122,7 +1026,7 @@
           <a:p>
             <a:fld id="{61CB208B-134F-A247-843F-FB0F3B432007}" type="datetimeFigureOut">
               <a:rPr lang="en-US" smtClean="0"/>
-              <a:t>7/16/26</a:t>
+              <a:t>7/24/26</a:t>
             </a:fld>
             <a:endParaRPr lang="en-US"/>
           </a:p>
@@ -1322,7 +1226,7 @@
           <a:p>
             <a:fld id="{61CB208B-134F-A247-843F-FB0F3B432007}" type="datetimeFigureOut">
               <a:rPr lang="en-US" smtClean="0"/>
-              <a:t>7/16/26</a:t>
+              <a:t>7/20/26</a:t>
             </a:fld>
             <a:endParaRPr lang="en-US"/>
           </a:p>
@@ -1598,7 +1502,7 @@
           <a:p>
             <a:fld id="{61CB208B-134F-A247-843F-FB0F3B432007}" type="datetimeFigureOut">
               <a:rPr lang="en-US" smtClean="0"/>
-              <a:t>7/16/26</a:t>
+              <a:t>7/24/26</a:t>
             </a:fld>
             <a:endParaRPr lang="en-US"/>
           </a:p>
@@ -1866,7 +1770,7 @@
           <a:p>
             <a:fld id="{61CB208B-134F-A247-843F-FB0F3B432007}" type="datetimeFigureOut">
               <a:rPr lang="en-US" smtClean="0"/>
-              <a:t>7/16/26</a:t>
+              <a:t>7/24/26</a:t>
             </a:fld>
             <a:endParaRPr lang="en-US"/>
           </a:p>
@@ -2281,7 +2185,7 @@
           <a:p>
             <a:fld id="{61CB208B-134F-A247-843F-FB0F3B432007}" type="datetimeFigureOut">
               <a:rPr lang="en-US" smtClean="0"/>
-              <a:t>7/16/26</a:t>
+              <a:t>7/24/26</a:t>
             </a:fld>
             <a:endParaRPr lang="en-US"/>
           </a:p>
@@ -2423,7 +2327,7 @@
           <a:p>
             <a:fld id="{61CB208B-134F-A247-843F-FB0F3B432007}" type="datetimeFigureOut">
               <a:rPr lang="en-US" smtClean="0"/>
-              <a:t>7/16/26</a:t>
+              <a:t>7/24/26</a:t>
             </a:fld>
             <a:endParaRPr lang="en-US"/>
           </a:p>
@@ -2536,7 +2440,7 @@
           <a:p>
             <a:fld id="{61CB208B-134F-A247-843F-FB0F3B432007}" type="datetimeFigureOut">
               <a:rPr lang="en-US" smtClean="0"/>
-              <a:t>7/16/26</a:t>
+              <a:t>7/20/26</a:t>
             </a:fld>
             <a:endParaRPr lang="en-US"/>
           </a:p>
@@ -2849,7 +2753,7 @@
           <a:p>
             <a:fld id="{61CB208B-134F-A247-843F-FB0F3B432007}" type="datetimeFigureOut">
               <a:rPr lang="en-US" smtClean="0"/>
-              <a:t>7/16/26</a:t>
+              <a:t>7/24/26</a:t>
             </a:fld>
             <a:endParaRPr lang="en-US"/>
           </a:p>
@@ -3138,7 +3042,7 @@
           <a:p>
             <a:fld id="{61CB208B-134F-A247-843F-FB0F3B432007}" type="datetimeFigureOut">
               <a:rPr lang="en-US" smtClean="0"/>
-              <a:t>7/16/26</a:t>
+              <a:t>7/24/26</a:t>
             </a:fld>
             <a:endParaRPr lang="en-US"/>
           </a:p>
@@ -3381,7 +3285,7 @@
           <a:p>
             <a:fld id="{61CB208B-134F-A247-843F-FB0F3B432007}" type="datetimeFigureOut">
               <a:rPr lang="en-US" smtClean="0"/>
-              <a:t>7/16/26</a:t>
+              <a:t>7/20/26</a:t>
             </a:fld>
             <a:endParaRPr lang="en-US"/>
           </a:p>
@@ -3888,10 +3792,10 @@
       </p:grpSpPr>
       <p:pic>
         <p:nvPicPr>
-          <p:cNvPr id="3" name="Picture 2">
-            <a:extLst>
-              <a:ext uri="{FF2B5EF4-FFF2-40B4-BE49-F238E27FC236}">
-                <a16:creationId xmlns:a16="http://schemas.microsoft.com/office/drawing/2014/main" id="{FFDE56F6-8AC7-A77D-58B0-F215D2AAB468}"/>
+          <p:cNvPr id="4" name="Picture 3">
+            <a:extLst>
+              <a:ext uri="{FF2B5EF4-FFF2-40B4-BE49-F238E27FC236}">
+                <a16:creationId xmlns:a16="http://schemas.microsoft.com/office/drawing/2014/main" id="{EA982CCB-AA66-BEB3-6754-8A04D9C57216}"/>
               </a:ext>
             </a:extLst>
           </p:cNvPr>
@@ -3908,8 +3812,8 @@
         </p:blipFill>
         <p:spPr>
           <a:xfrm>
-            <a:off x="4305695" y="0"/>
-            <a:ext cx="3373824" cy="3049562"/>
+            <a:off x="5051047" y="310659"/>
+            <a:ext cx="3467759" cy="2880000"/>
           </a:xfrm>
           <a:prstGeom prst="rect">
             <a:avLst/>
@@ -3921,7 +3825,7 @@
           <p:cNvPr id="5" name="Picture 4">
             <a:extLst>
               <a:ext uri="{FF2B5EF4-FFF2-40B4-BE49-F238E27FC236}">
-                <a16:creationId xmlns:a16="http://schemas.microsoft.com/office/drawing/2014/main" id="{953FD376-4311-E01A-21D2-FAB1EB778FC6}"/>
+                <a16:creationId xmlns:a16="http://schemas.microsoft.com/office/drawing/2014/main" id="{D95E8884-E454-877D-01D6-EB3B719B9880}"/>
               </a:ext>
             </a:extLst>
           </p:cNvPr>
@@ -3938,20 +3842,241 @@
         </p:blipFill>
         <p:spPr>
           <a:xfrm>
-            <a:off x="7932991" y="45720"/>
-            <a:ext cx="3873607" cy="3383280"/>
+            <a:off x="5330551" y="3429000"/>
+            <a:ext cx="3188255" cy="2880000"/>
           </a:xfrm>
           <a:prstGeom prst="rect">
             <a:avLst/>
           </a:prstGeom>
         </p:spPr>
       </p:pic>
+      <p:sp>
+        <p:nvSpPr>
+          <p:cNvPr id="8" name="Title 1">
+            <a:extLst>
+              <a:ext uri="{FF2B5EF4-FFF2-40B4-BE49-F238E27FC236}">
+                <a16:creationId xmlns:a16="http://schemas.microsoft.com/office/drawing/2014/main" id="{A19278EE-14F9-CC14-1649-74CEED8066FA}"/>
+              </a:ext>
+            </a:extLst>
+          </p:cNvPr>
+          <p:cNvSpPr txBox="1">
+            <a:spLocks/>
+          </p:cNvSpPr>
+          <p:nvPr/>
+        </p:nvSpPr>
+        <p:spPr>
+          <a:xfrm>
+            <a:off x="229338" y="1287335"/>
+            <a:ext cx="4843592" cy="926648"/>
+          </a:xfrm>
+          <a:prstGeom prst="rect">
+            <a:avLst/>
+          </a:prstGeom>
+        </p:spPr>
+        <p:txBody>
+          <a:bodyPr vert="horz" lIns="91440" tIns="45720" rIns="91440" bIns="45720" rtlCol="0" anchor="ctr">
+            <a:normAutofit/>
+          </a:bodyPr>
+          <a:lstStyle>
+            <a:lvl1pPr algn="l" defTabSz="914400" rtl="0" eaLnBrk="1" latinLnBrk="0" hangingPunct="1">
+              <a:lnSpc>
+                <a:spcPct val="90000"/>
+              </a:lnSpc>
+              <a:spcBef>
+                <a:spcPct val="0"/>
+              </a:spcBef>
+              <a:buNone/>
+              <a:defRPr sz="4400" kern="1200">
+                <a:solidFill>
+                  <a:schemeClr val="tx1"/>
+                </a:solidFill>
+                <a:latin typeface="+mj-lt"/>
+                <a:ea typeface="+mj-ea"/>
+                <a:cs typeface="+mj-cs"/>
+              </a:defRPr>
+            </a:lvl1pPr>
+          </a:lstStyle>
+          <a:p>
+            <a:pPr algn="ctr"/>
+            <a:r>
+              <a:rPr lang="en-US" sz="2800" b="1" dirty="0">
+                <a:latin typeface="Arial" panose="020B0604020202020204" pitchFamily="34" charset="0"/>
+                <a:cs typeface="Arial" panose="020B0604020202020204" pitchFamily="34" charset="0"/>
+              </a:rPr>
+              <a:t>Classic scenario: </a:t>
+            </a:r>
+          </a:p>
+          <a:p>
+            <a:pPr algn="ctr"/>
+            <a:r>
+              <a:rPr lang="en-US" sz="2800" b="1" dirty="0">
+                <a:latin typeface="Arial" panose="020B0604020202020204" pitchFamily="34" charset="0"/>
+                <a:cs typeface="Arial" panose="020B0604020202020204" pitchFamily="34" charset="0"/>
+              </a:rPr>
+              <a:t>Sys + Envir</a:t>
+            </a:r>
+          </a:p>
+        </p:txBody>
+      </p:sp>
+      <p:sp>
+        <p:nvSpPr>
+          <p:cNvPr id="9" name="Title 1">
+            <a:extLst>
+              <a:ext uri="{FF2B5EF4-FFF2-40B4-BE49-F238E27FC236}">
+                <a16:creationId xmlns:a16="http://schemas.microsoft.com/office/drawing/2014/main" id="{CA685F9D-E7C6-CB06-D5DE-8CCA65FD6405}"/>
+              </a:ext>
+            </a:extLst>
+          </p:cNvPr>
+          <p:cNvSpPr txBox="1">
+            <a:spLocks/>
+          </p:cNvSpPr>
+          <p:nvPr/>
+        </p:nvSpPr>
+        <p:spPr>
+          <a:xfrm>
+            <a:off x="229338" y="2638636"/>
+            <a:ext cx="8858480" cy="2390564"/>
+          </a:xfrm>
+          <a:prstGeom prst="rect">
+            <a:avLst/>
+          </a:prstGeom>
+        </p:spPr>
+        <p:txBody>
+          <a:bodyPr vert="horz" lIns="91440" tIns="45720" rIns="91440" bIns="45720" rtlCol="0" anchor="ctr">
+            <a:normAutofit/>
+          </a:bodyPr>
+          <a:lstStyle>
+            <a:lvl1pPr algn="l" defTabSz="914400" rtl="0" eaLnBrk="1" latinLnBrk="0" hangingPunct="1">
+              <a:lnSpc>
+                <a:spcPct val="90000"/>
+              </a:lnSpc>
+              <a:spcBef>
+                <a:spcPct val="0"/>
+              </a:spcBef>
+              <a:buNone/>
+              <a:defRPr sz="4400" kern="1200">
+                <a:solidFill>
+                  <a:schemeClr val="tx1"/>
+                </a:solidFill>
+                <a:latin typeface="+mj-lt"/>
+                <a:ea typeface="+mj-ea"/>
+                <a:cs typeface="+mj-cs"/>
+              </a:defRPr>
+            </a:lvl1pPr>
+          </a:lstStyle>
+          <a:p>
+            <a:pPr marL="342900" indent="-342900">
+              <a:lnSpc>
+                <a:spcPct val="150000"/>
+              </a:lnSpc>
+              <a:buFont typeface="Arial" panose="020B0604020202020204" pitchFamily="34" charset="0"/>
+              <a:buChar char="•"/>
+            </a:pPr>
+            <a:r>
+              <a:rPr lang="en-US" sz="2000" b="1" dirty="0">
+                <a:latin typeface="Arial" panose="020B0604020202020204" pitchFamily="34" charset="0"/>
+                <a:cs typeface="Arial" panose="020B0604020202020204" pitchFamily="34" charset="0"/>
+              </a:rPr>
+              <a:t>QMI: </a:t>
+            </a:r>
+            <a:r>
+              <a:rPr lang="en-US" sz="2000" dirty="0">
+                <a:latin typeface="Arial" panose="020B0604020202020204" pitchFamily="34" charset="0"/>
+                <a:cs typeface="Arial" panose="020B0604020202020204" pitchFamily="34" charset="0"/>
+              </a:rPr>
+              <a:t>Total correlation between S and F</a:t>
+            </a:r>
+          </a:p>
+          <a:p>
+            <a:pPr marL="342900" indent="-342900">
+              <a:lnSpc>
+                <a:spcPct val="150000"/>
+              </a:lnSpc>
+              <a:buFont typeface="Arial" panose="020B0604020202020204" pitchFamily="34" charset="0"/>
+              <a:buChar char="•"/>
+            </a:pPr>
+            <a:r>
+              <a:rPr lang="en-US" sz="2000" b="1" dirty="0">
+                <a:latin typeface="Arial" panose="020B0604020202020204" pitchFamily="34" charset="0"/>
+                <a:cs typeface="Arial" panose="020B0604020202020204" pitchFamily="34" charset="0"/>
+              </a:rPr>
+              <a:t>Discord: </a:t>
+            </a:r>
+            <a:r>
+              <a:rPr lang="en-US" sz="2000" dirty="0">
+                <a:latin typeface="Arial" panose="020B0604020202020204" pitchFamily="34" charset="0"/>
+                <a:cs typeface="Arial" panose="020B0604020202020204" pitchFamily="34" charset="0"/>
+              </a:rPr>
+              <a:t> Quantum correlation</a:t>
+            </a:r>
+          </a:p>
+          <a:p>
+            <a:pPr marL="342900" indent="-342900">
+              <a:lnSpc>
+                <a:spcPct val="150000"/>
+              </a:lnSpc>
+              <a:buFont typeface="Arial" panose="020B0604020202020204" pitchFamily="34" charset="0"/>
+              <a:buChar char="•"/>
+            </a:pPr>
+            <a:r>
+              <a:rPr lang="en-US" sz="2000" b="1" dirty="0">
+                <a:latin typeface="Arial" panose="020B0604020202020204" pitchFamily="34" charset="0"/>
+                <a:cs typeface="Arial" panose="020B0604020202020204" pitchFamily="34" charset="0"/>
+              </a:rPr>
+              <a:t>Holevo: </a:t>
+            </a:r>
+            <a:r>
+              <a:rPr lang="en-US" sz="2000" dirty="0">
+                <a:latin typeface="Arial" panose="020B0604020202020204" pitchFamily="34" charset="0"/>
+                <a:cs typeface="Arial" panose="020B0604020202020204" pitchFamily="34" charset="0"/>
+              </a:rPr>
+              <a:t> Classical correlation</a:t>
+            </a:r>
+          </a:p>
+          <a:p>
+            <a:pPr marL="342900" indent="-342900">
+              <a:lnSpc>
+                <a:spcPct val="150000"/>
+              </a:lnSpc>
+              <a:buFont typeface="Arial" panose="020B0604020202020204" pitchFamily="34" charset="0"/>
+              <a:buChar char="•"/>
+            </a:pPr>
+            <a:r>
+              <a:rPr lang="en-US" sz="2000" b="1" dirty="0">
+                <a:latin typeface="Arial" panose="020B0604020202020204" pitchFamily="34" charset="0"/>
+                <a:cs typeface="Arial" panose="020B0604020202020204" pitchFamily="34" charset="0"/>
+              </a:rPr>
+              <a:t>Sys-envir interaction: </a:t>
+            </a:r>
+            <a:r>
+              <a:rPr lang="en-US" sz="2000" dirty="0">
+                <a:latin typeface="Arial" panose="020B0604020202020204" pitchFamily="34" charset="0"/>
+                <a:cs typeface="Arial" panose="020B0604020202020204" pitchFamily="34" charset="0"/>
+              </a:rPr>
+              <a:t>U3 gate</a:t>
+            </a:r>
+          </a:p>
+          <a:p>
+            <a:pPr marL="342900" indent="-342900">
+              <a:lnSpc>
+                <a:spcPct val="150000"/>
+              </a:lnSpc>
+              <a:buFont typeface="Arial" panose="020B0604020202020204" pitchFamily="34" charset="0"/>
+              <a:buChar char="•"/>
+            </a:pPr>
+            <a:endParaRPr lang="en-US" sz="2000" b="1" dirty="0">
+              <a:latin typeface="Arial" panose="020B0604020202020204" pitchFamily="34" charset="0"/>
+              <a:cs typeface="Arial" panose="020B0604020202020204" pitchFamily="34" charset="0"/>
+            </a:endParaRPr>
+          </a:p>
+        </p:txBody>
+      </p:sp>
       <p:pic>
         <p:nvPicPr>
-          <p:cNvPr id="7" name="Picture 6">
-            <a:extLst>
-              <a:ext uri="{FF2B5EF4-FFF2-40B4-BE49-F238E27FC236}">
-                <a16:creationId xmlns:a16="http://schemas.microsoft.com/office/drawing/2014/main" id="{40323A2A-654C-F9C6-8E94-FF2423FE377D}"/>
+          <p:cNvPr id="10" name="Picture 9">
+            <a:extLst>
+              <a:ext uri="{FF2B5EF4-FFF2-40B4-BE49-F238E27FC236}">
+                <a16:creationId xmlns:a16="http://schemas.microsoft.com/office/drawing/2014/main" id="{99070A17-41E7-A9E7-60C9-8F8BED2FCADF}"/>
               </a:ext>
             </a:extLst>
           </p:cNvPr>
@@ -3968,8 +4093,8 @@
         </p:blipFill>
         <p:spPr>
           <a:xfrm>
-            <a:off x="7932991" y="3429000"/>
-            <a:ext cx="3873607" cy="3383280"/>
+            <a:off x="8518806" y="3429000"/>
+            <a:ext cx="3443856" cy="2880000"/>
           </a:xfrm>
           <a:prstGeom prst="rect">
             <a:avLst/>
@@ -3978,10 +4103,10 @@
       </p:pic>
       <p:pic>
         <p:nvPicPr>
-          <p:cNvPr id="9" name="Picture 8">
-            <a:extLst>
-              <a:ext uri="{FF2B5EF4-FFF2-40B4-BE49-F238E27FC236}">
-                <a16:creationId xmlns:a16="http://schemas.microsoft.com/office/drawing/2014/main" id="{998436AC-264E-6331-F12C-D97D9F649968}"/>
+          <p:cNvPr id="12" name="Picture 11">
+            <a:extLst>
+              <a:ext uri="{FF2B5EF4-FFF2-40B4-BE49-F238E27FC236}">
+                <a16:creationId xmlns:a16="http://schemas.microsoft.com/office/drawing/2014/main" id="{F667BA6A-37AD-64B9-A07C-5291E42F0418}"/>
               </a:ext>
             </a:extLst>
           </p:cNvPr>
@@ -3998,8 +4123,8 @@
         </p:blipFill>
         <p:spPr>
           <a:xfrm>
-            <a:off x="4305695" y="3429000"/>
-            <a:ext cx="3373824" cy="3049562"/>
+            <a:off x="8494903" y="310659"/>
+            <a:ext cx="3467759" cy="2880000"/>
           </a:xfrm>
           <a:prstGeom prst="rect">
             <a:avLst/>
@@ -4008,185 +4133,79 @@
       </p:pic>
       <p:sp>
         <p:nvSpPr>
-          <p:cNvPr id="2" name="Title 1">
-            <a:extLst>
-              <a:ext uri="{FF2B5EF4-FFF2-40B4-BE49-F238E27FC236}">
-                <a16:creationId xmlns:a16="http://schemas.microsoft.com/office/drawing/2014/main" id="{52A48C13-98E2-5A08-49F4-951022AAA925}"/>
-              </a:ext>
-            </a:extLst>
-          </p:cNvPr>
-          <p:cNvSpPr txBox="1">
-            <a:spLocks/>
-          </p:cNvSpPr>
+          <p:cNvPr id="15" name="TextBox 14">
+            <a:extLst>
+              <a:ext uri="{FF2B5EF4-FFF2-40B4-BE49-F238E27FC236}">
+                <a16:creationId xmlns:a16="http://schemas.microsoft.com/office/drawing/2014/main" id="{C286D7FE-ABD6-0DC1-8FAF-05B3C32DD995}"/>
+              </a:ext>
+            </a:extLst>
+          </p:cNvPr>
+          <p:cNvSpPr txBox="1"/>
           <p:nvPr/>
         </p:nvSpPr>
         <p:spPr>
           <a:xfrm>
-            <a:off x="138916" y="457981"/>
-            <a:ext cx="3947662" cy="2133600"/>
+            <a:off x="6784926" y="665206"/>
+            <a:ext cx="864339" cy="369332"/>
           </a:xfrm>
           <a:prstGeom prst="rect">
             <a:avLst/>
           </a:prstGeom>
+          <a:noFill/>
         </p:spPr>
         <p:txBody>
-          <a:bodyPr vert="horz" lIns="91440" tIns="45720" rIns="91440" bIns="45720" rtlCol="0" anchor="ctr">
-            <a:normAutofit/>
+          <a:bodyPr wrap="none" rtlCol="0">
+            <a:spAutoFit/>
           </a:bodyPr>
-          <a:lstStyle>
-            <a:lvl1pPr algn="l" defTabSz="914400" rtl="0" eaLnBrk="1" latinLnBrk="0" hangingPunct="1">
-              <a:lnSpc>
-                <a:spcPct val="90000"/>
-              </a:lnSpc>
-              <a:spcBef>
-                <a:spcPct val="0"/>
-              </a:spcBef>
-              <a:buNone/>
-              <a:defRPr sz="4400" kern="1200">
-                <a:solidFill>
-                  <a:schemeClr val="tx1"/>
-                </a:solidFill>
-                <a:latin typeface="+mj-lt"/>
-                <a:ea typeface="+mj-ea"/>
-                <a:cs typeface="+mj-cs"/>
-              </a:defRPr>
-            </a:lvl1pPr>
-          </a:lstStyle>
-          <a:p>
-            <a:r>
-              <a:rPr lang="vi-VN" sz="2000" dirty="0">
-                <a:latin typeface="+mn-lt"/>
-              </a:rPr>
-              <a:t>Model: Sys + Envir</a:t>
-            </a:r>
-          </a:p>
-          <a:p>
-            <a:endParaRPr lang="vi-VN" sz="2000" dirty="0">
-              <a:latin typeface="+mn-lt"/>
-            </a:endParaRPr>
-          </a:p>
-          <a:p>
-            <a:pPr marL="342900" indent="-342900">
-              <a:buFont typeface="Arial" panose="020B0604020202020204" pitchFamily="34" charset="0"/>
-              <a:buChar char="•"/>
-            </a:pPr>
-            <a:r>
-              <a:rPr lang="vi-VN" sz="2000" dirty="0">
-                <a:latin typeface="+mn-lt"/>
-              </a:rPr>
-              <a:t>Sys + Envir interacton: U(π/2)</a:t>
-            </a:r>
-          </a:p>
-          <a:p>
-            <a:endParaRPr lang="en-US" sz="2000" dirty="0">
-              <a:latin typeface="+mn-lt"/>
-            </a:endParaRPr>
-          </a:p>
-        </p:txBody>
-      </p:sp>
-      <p:sp>
-        <p:nvSpPr>
-          <p:cNvPr id="4" name="Title 1">
-            <a:extLst>
-              <a:ext uri="{FF2B5EF4-FFF2-40B4-BE49-F238E27FC236}">
-                <a16:creationId xmlns:a16="http://schemas.microsoft.com/office/drawing/2014/main" id="{CDCAE86E-C6D9-2494-92C5-4F1438493E09}"/>
-              </a:ext>
-            </a:extLst>
-          </p:cNvPr>
-          <p:cNvSpPr txBox="1">
-            <a:spLocks/>
-          </p:cNvSpPr>
+          <a:lstStyle/>
+          <a:p>
+            <a:r>
+              <a:rPr lang="en-VN" dirty="0"/>
+              <a:t>θ = π/2</a:t>
+            </a:r>
+          </a:p>
+        </p:txBody>
+      </p:sp>
+      <p:sp>
+        <p:nvSpPr>
+          <p:cNvPr id="16" name="TextBox 15">
+            <a:extLst>
+              <a:ext uri="{FF2B5EF4-FFF2-40B4-BE49-F238E27FC236}">
+                <a16:creationId xmlns:a16="http://schemas.microsoft.com/office/drawing/2014/main" id="{739F7CC3-F552-03B7-3FD3-8D84D6F86B03}"/>
+              </a:ext>
+            </a:extLst>
+          </p:cNvPr>
+          <p:cNvSpPr txBox="1"/>
           <p:nvPr/>
         </p:nvSpPr>
         <p:spPr>
           <a:xfrm>
-            <a:off x="138916" y="3886981"/>
-            <a:ext cx="3947662" cy="2133600"/>
+            <a:off x="10252685" y="665206"/>
+            <a:ext cx="662361" cy="369332"/>
           </a:xfrm>
           <a:prstGeom prst="rect">
             <a:avLst/>
           </a:prstGeom>
+          <a:noFill/>
         </p:spPr>
         <p:txBody>
-          <a:bodyPr vert="horz" lIns="91440" tIns="45720" rIns="91440" bIns="45720" rtlCol="0" anchor="ctr">
-            <a:normAutofit/>
+          <a:bodyPr wrap="none" rtlCol="0">
+            <a:spAutoFit/>
           </a:bodyPr>
-          <a:lstStyle>
-            <a:lvl1pPr algn="l" defTabSz="914400" rtl="0" eaLnBrk="1" latinLnBrk="0" hangingPunct="1">
-              <a:lnSpc>
-                <a:spcPct val="90000"/>
-              </a:lnSpc>
-              <a:spcBef>
-                <a:spcPct val="0"/>
-              </a:spcBef>
-              <a:buNone/>
-              <a:defRPr sz="4400" kern="1200">
-                <a:solidFill>
-                  <a:schemeClr val="tx1"/>
-                </a:solidFill>
-                <a:latin typeface="+mj-lt"/>
-                <a:ea typeface="+mj-ea"/>
-                <a:cs typeface="+mj-cs"/>
-              </a:defRPr>
-            </a:lvl1pPr>
-          </a:lstStyle>
-          <a:p>
-            <a:r>
-              <a:rPr lang="vi-VN" sz="2000" dirty="0">
-                <a:latin typeface="+mn-lt"/>
-              </a:rPr>
-              <a:t>Model: Sys + Obs + Envir</a:t>
-            </a:r>
-          </a:p>
-          <a:p>
-            <a:endParaRPr lang="vi-VN" sz="2000" dirty="0">
-              <a:latin typeface="+mn-lt"/>
-            </a:endParaRPr>
-          </a:p>
-          <a:p>
-            <a:pPr marL="342900" indent="-342900">
-              <a:buFont typeface="Arial" panose="020B0604020202020204" pitchFamily="34" charset="0"/>
-              <a:buChar char="•"/>
-            </a:pPr>
-            <a:r>
-              <a:rPr lang="vi-VN" sz="2000" dirty="0">
-                <a:latin typeface="+mn-lt"/>
-              </a:rPr>
-              <a:t>Sys + Obs interaction: U(π/2)</a:t>
-            </a:r>
-          </a:p>
-          <a:p>
-            <a:pPr marL="342900" indent="-342900">
-              <a:buFont typeface="Arial" panose="020B0604020202020204" pitchFamily="34" charset="0"/>
-              <a:buChar char="•"/>
-            </a:pPr>
-            <a:endParaRPr lang="vi-VN" sz="2000" dirty="0">
-              <a:latin typeface="+mn-lt"/>
-            </a:endParaRPr>
-          </a:p>
-          <a:p>
-            <a:pPr marL="342900" indent="-342900">
-              <a:buFont typeface="Arial" panose="020B0604020202020204" pitchFamily="34" charset="0"/>
-              <a:buChar char="•"/>
-            </a:pPr>
-            <a:r>
-              <a:rPr lang="vi-VN" sz="2000" dirty="0">
-                <a:latin typeface="+mn-lt"/>
-              </a:rPr>
-              <a:t>Sys + Envir interacton: U(π/2)</a:t>
-            </a:r>
-          </a:p>
-          <a:p>
-            <a:endParaRPr lang="en-US" sz="2000" dirty="0">
-              <a:latin typeface="+mn-lt"/>
-            </a:endParaRPr>
+          <a:lstStyle/>
+          <a:p>
+            <a:pPr algn="ctr"/>
+            <a:r>
+              <a:rPr lang="en-VN" dirty="0"/>
+              <a:t>θ = π</a:t>
+            </a:r>
           </a:p>
         </p:txBody>
       </p:sp>
     </p:spTree>
     <p:extLst>
       <p:ext uri="{BB962C8B-B14F-4D97-AF65-F5344CB8AC3E}">
-        <p14:creationId xmlns:p14="http://schemas.microsoft.com/office/powerpoint/2010/main" val="561106064"/>
+        <p14:creationId xmlns:p14="http://schemas.microsoft.com/office/powerpoint/2010/main" val="3164137903"/>
       </p:ext>
     </p:extLst>
   </p:cSld>
@@ -4215,10 +4234,10 @@
       </p:grpSpPr>
       <p:pic>
         <p:nvPicPr>
-          <p:cNvPr id="3" name="Picture 2">
-            <a:extLst>
-              <a:ext uri="{FF2B5EF4-FFF2-40B4-BE49-F238E27FC236}">
-                <a16:creationId xmlns:a16="http://schemas.microsoft.com/office/drawing/2014/main" id="{F6AE33CE-750F-67D1-0390-635036F42A28}"/>
+          <p:cNvPr id="5" name="Picture 4">
+            <a:extLst>
+              <a:ext uri="{FF2B5EF4-FFF2-40B4-BE49-F238E27FC236}">
+                <a16:creationId xmlns:a16="http://schemas.microsoft.com/office/drawing/2014/main" id="{C161C424-9C27-B8F8-9A43-389B5D7D9284}"/>
               </a:ext>
             </a:extLst>
           </p:cNvPr>
@@ -4235,8 +4254,8 @@
         </p:blipFill>
         <p:spPr>
           <a:xfrm>
-            <a:off x="8296657" y="322598"/>
-            <a:ext cx="3411367" cy="2979548"/>
+            <a:off x="7726768" y="360000"/>
+            <a:ext cx="3467756" cy="2880000"/>
           </a:xfrm>
           <a:prstGeom prst="rect">
             <a:avLst/>
@@ -4245,10 +4264,10 @@
       </p:pic>
       <p:pic>
         <p:nvPicPr>
-          <p:cNvPr id="4" name="Picture 3">
-            <a:extLst>
-              <a:ext uri="{FF2B5EF4-FFF2-40B4-BE49-F238E27FC236}">
-                <a16:creationId xmlns:a16="http://schemas.microsoft.com/office/drawing/2014/main" id="{8547CB38-6AF7-493B-0B6E-CB3717D2C367}"/>
+          <p:cNvPr id="6" name="Picture 5">
+            <a:extLst>
+              <a:ext uri="{FF2B5EF4-FFF2-40B4-BE49-F238E27FC236}">
+                <a16:creationId xmlns:a16="http://schemas.microsoft.com/office/drawing/2014/main" id="{3F21D931-3E34-E06F-6EF0-C3857A2A3675}"/>
               </a:ext>
             </a:extLst>
           </p:cNvPr>
@@ -4265,8 +4284,112 @@
         </p:blipFill>
         <p:spPr>
           <a:xfrm>
-            <a:off x="4198028" y="180621"/>
-            <a:ext cx="3593778" cy="3248380"/>
+            <a:off x="4711232" y="189000"/>
+            <a:ext cx="3170025" cy="2884406"/>
+          </a:xfrm>
+          <a:prstGeom prst="rect">
+            <a:avLst/>
+          </a:prstGeom>
+        </p:spPr>
+      </p:pic>
+      <p:sp>
+        <p:nvSpPr>
+          <p:cNvPr id="9" name="TextBox 8">
+            <a:extLst>
+              <a:ext uri="{FF2B5EF4-FFF2-40B4-BE49-F238E27FC236}">
+                <a16:creationId xmlns:a16="http://schemas.microsoft.com/office/drawing/2014/main" id="{3C00E6D1-FA2A-6FD2-7C3A-72DCA0D37AF1}"/>
+              </a:ext>
+            </a:extLst>
+          </p:cNvPr>
+          <p:cNvSpPr txBox="1"/>
+          <p:nvPr/>
+        </p:nvSpPr>
+        <p:spPr>
+          <a:xfrm>
+            <a:off x="341789" y="2079485"/>
+            <a:ext cx="4369443" cy="1077218"/>
+          </a:xfrm>
+          <a:prstGeom prst="rect">
+            <a:avLst/>
+          </a:prstGeom>
+          <a:noFill/>
+        </p:spPr>
+        <p:txBody>
+          <a:bodyPr wrap="square">
+            <a:spAutoFit/>
+          </a:bodyPr>
+          <a:lstStyle/>
+          <a:p>
+            <a:pPr algn="ctr"/>
+            <a:r>
+              <a:rPr lang="en-US" sz="3200" b="1" dirty="0">
+                <a:latin typeface="Arial" panose="020B0604020202020204" pitchFamily="34" charset="0"/>
+                <a:cs typeface="Arial" panose="020B0604020202020204" pitchFamily="34" charset="0"/>
+              </a:rPr>
+              <a:t>Modified scenario: Sys + Obs + Envir</a:t>
+            </a:r>
+          </a:p>
+        </p:txBody>
+      </p:sp>
+      <p:sp>
+        <p:nvSpPr>
+          <p:cNvPr id="22" name="TextBox 21">
+            <a:extLst>
+              <a:ext uri="{FF2B5EF4-FFF2-40B4-BE49-F238E27FC236}">
+                <a16:creationId xmlns:a16="http://schemas.microsoft.com/office/drawing/2014/main" id="{03BBCD6A-54F6-209E-CEFC-5830B62F3417}"/>
+              </a:ext>
+            </a:extLst>
+          </p:cNvPr>
+          <p:cNvSpPr txBox="1"/>
+          <p:nvPr/>
+        </p:nvSpPr>
+        <p:spPr>
+          <a:xfrm>
+            <a:off x="9948110" y="1123745"/>
+            <a:ext cx="1046462" cy="369332"/>
+          </a:xfrm>
+          <a:prstGeom prst="rect">
+            <a:avLst/>
+          </a:prstGeom>
+          <a:noFill/>
+        </p:spPr>
+        <p:txBody>
+          <a:bodyPr wrap="square">
+            <a:spAutoFit/>
+          </a:bodyPr>
+          <a:lstStyle/>
+          <a:p>
+            <a:r>
+              <a:rPr lang="en-VN" dirty="0"/>
+              <a:t>θ = π</a:t>
+            </a:r>
+          </a:p>
+        </p:txBody>
+      </p:sp>
+      <p:pic>
+        <p:nvPicPr>
+          <p:cNvPr id="23" name="Picture 22">
+            <a:extLst>
+              <a:ext uri="{FF2B5EF4-FFF2-40B4-BE49-F238E27FC236}">
+                <a16:creationId xmlns:a16="http://schemas.microsoft.com/office/drawing/2014/main" id="{D2ADE3AC-EEC9-8BA6-F934-690E565501C2}"/>
+              </a:ext>
+            </a:extLst>
+          </p:cNvPr>
+          <p:cNvPicPr>
+            <a:picLocks noChangeAspect="1"/>
+          </p:cNvPicPr>
+          <p:nvPr/>
+        </p:nvPicPr>
+        <p:blipFill>
+          <a:blip r:embed="rId4"/>
+          <a:stretch>
+            <a:fillRect/>
+          </a:stretch>
+        </p:blipFill>
+        <p:spPr>
+          <a:xfrm>
+            <a:off x="8455232" y="3389329"/>
+            <a:ext cx="3400482" cy="2880000"/>
           </a:xfrm>
           <a:prstGeom prst="rect">
             <a:avLst/>
@@ -4275,307 +4398,118 @@
       </p:pic>
       <p:pic>
         <p:nvPicPr>
-          <p:cNvPr id="2" name="Picture 2" descr="No description available.">
-            <a:extLst>
-              <a:ext uri="{FF2B5EF4-FFF2-40B4-BE49-F238E27FC236}">
-                <a16:creationId xmlns:a16="http://schemas.microsoft.com/office/drawing/2014/main" id="{A8534E09-2315-F64F-DF8E-6504ED9783CD}"/>
+          <p:cNvPr id="24" name="Picture 23">
+            <a:extLst>
+              <a:ext uri="{FF2B5EF4-FFF2-40B4-BE49-F238E27FC236}">
+                <a16:creationId xmlns:a16="http://schemas.microsoft.com/office/drawing/2014/main" id="{807AF7BC-724B-5F35-3DA2-CCC675BAFF62}"/>
               </a:ext>
             </a:extLst>
           </p:cNvPr>
           <p:cNvPicPr>
-            <a:picLocks noChangeAspect="1" noChangeArrowheads="1"/>
+            <a:picLocks noChangeAspect="1"/>
           </p:cNvPicPr>
           <p:nvPr/>
         </p:nvPicPr>
         <p:blipFill>
-          <a:blip r:embed="rId4">
-            <a:extLst>
-              <a:ext uri="{28A0092B-C50C-407E-A947-70E740481C1C}">
-                <a14:useLocalDpi xmlns:a14="http://schemas.microsoft.com/office/drawing/2010/main" val="0"/>
-              </a:ext>
-            </a:extLst>
-          </a:blip>
-          <a:srcRect/>
+          <a:blip r:embed="rId5"/>
           <a:stretch>
             <a:fillRect/>
           </a:stretch>
         </p:blipFill>
-        <p:spPr bwMode="auto">
+        <p:spPr>
           <a:xfrm>
-            <a:off x="8296657" y="3555855"/>
-            <a:ext cx="3411367" cy="2979601"/>
+            <a:off x="4711232" y="3389329"/>
+            <a:ext cx="3744000" cy="2880000"/>
+          </a:xfrm>
+          <a:prstGeom prst="rect">
+            <a:avLst/>
+          </a:prstGeom>
+        </p:spPr>
+      </p:pic>
+      <p:sp>
+        <p:nvSpPr>
+          <p:cNvPr id="25" name="TextBox 24">
+            <a:extLst>
+              <a:ext uri="{FF2B5EF4-FFF2-40B4-BE49-F238E27FC236}">
+                <a16:creationId xmlns:a16="http://schemas.microsoft.com/office/drawing/2014/main" id="{B439C357-18F7-F249-C0A7-88E3A04E2909}"/>
+              </a:ext>
+            </a:extLst>
+          </p:cNvPr>
+          <p:cNvSpPr txBox="1"/>
+          <p:nvPr/>
+        </p:nvSpPr>
+        <p:spPr>
+          <a:xfrm>
+            <a:off x="336286" y="3429000"/>
+            <a:ext cx="4369443" cy="1432893"/>
           </a:xfrm>
           <a:prstGeom prst="rect">
             <a:avLst/>
           </a:prstGeom>
           <a:noFill/>
-          <a:extLst>
-            <a:ext uri="{909E8E84-426E-40DD-AFC4-6F175D3DCCD1}">
-              <a14:hiddenFill xmlns:a14="http://schemas.microsoft.com/office/drawing/2010/main">
-                <a:solidFill>
-                  <a:srgbClr val="FFFFFF"/>
-                </a:solidFill>
-              </a14:hiddenFill>
-            </a:ext>
-          </a:extLst>
         </p:spPr>
-      </p:pic>
-      <p:pic>
-        <p:nvPicPr>
-          <p:cNvPr id="5" name="Picture 4" descr="No description available.">
-            <a:extLst>
-              <a:ext uri="{FF2B5EF4-FFF2-40B4-BE49-F238E27FC236}">
-                <a16:creationId xmlns:a16="http://schemas.microsoft.com/office/drawing/2014/main" id="{7E75C899-8F8C-8220-EB47-19C8E77A9FA8}"/>
-              </a:ext>
-            </a:extLst>
-          </p:cNvPr>
-          <p:cNvPicPr>
-            <a:picLocks noChangeAspect="1" noChangeArrowheads="1"/>
-          </p:cNvPicPr>
-          <p:nvPr/>
-        </p:nvPicPr>
-        <p:blipFill>
-          <a:blip r:embed="rId5">
-            <a:extLst>
-              <a:ext uri="{28A0092B-C50C-407E-A947-70E740481C1C}">
-                <a14:useLocalDpi xmlns:a14="http://schemas.microsoft.com/office/drawing/2010/main" val="0"/>
-              </a:ext>
-            </a:extLst>
-          </a:blip>
-          <a:srcRect/>
-          <a:stretch>
-            <a:fillRect/>
-          </a:stretch>
-        </p:blipFill>
-        <p:spPr bwMode="auto">
-          <a:xfrm>
-            <a:off x="4198028" y="3429000"/>
-            <a:ext cx="3593778" cy="3248613"/>
-          </a:xfrm>
-          <a:prstGeom prst="rect">
-            <a:avLst/>
-          </a:prstGeom>
-          <a:noFill/>
-          <a:extLst>
-            <a:ext uri="{909E8E84-426E-40DD-AFC4-6F175D3DCCD1}">
-              <a14:hiddenFill xmlns:a14="http://schemas.microsoft.com/office/drawing/2010/main">
-                <a:solidFill>
-                  <a:srgbClr val="FFFFFF"/>
-                </a:solidFill>
-              </a14:hiddenFill>
-            </a:ext>
-          </a:extLst>
-        </p:spPr>
-      </p:pic>
-      <p:sp>
-        <p:nvSpPr>
-          <p:cNvPr id="6" name="Title 1">
-            <a:extLst>
-              <a:ext uri="{FF2B5EF4-FFF2-40B4-BE49-F238E27FC236}">
-                <a16:creationId xmlns:a16="http://schemas.microsoft.com/office/drawing/2014/main" id="{8A1547BF-3955-06C9-FC1C-5CE8AF67472D}"/>
-              </a:ext>
-            </a:extLst>
-          </p:cNvPr>
-          <p:cNvSpPr txBox="1">
-            <a:spLocks/>
-          </p:cNvSpPr>
-          <p:nvPr/>
-        </p:nvSpPr>
-        <p:spPr>
-          <a:xfrm>
-            <a:off x="138916" y="457981"/>
-            <a:ext cx="3947662" cy="2133600"/>
-          </a:xfrm>
-          <a:prstGeom prst="rect">
-            <a:avLst/>
-          </a:prstGeom>
-        </p:spPr>
-        <p:txBody>
-          <a:bodyPr vert="horz" lIns="91440" tIns="45720" rIns="91440" bIns="45720" rtlCol="0" anchor="ctr">
-            <a:normAutofit/>
+        <p:txBody>
+          <a:bodyPr wrap="square">
+            <a:spAutoFit/>
           </a:bodyPr>
-          <a:lstStyle>
-            <a:lvl1pPr algn="l" defTabSz="914400" rtl="0" eaLnBrk="1" latinLnBrk="0" hangingPunct="1">
+          <a:lstStyle/>
+          <a:p>
+            <a:pPr marL="457200" indent="-457200">
               <a:lnSpc>
-                <a:spcPct val="90000"/>
+                <a:spcPct val="150000"/>
               </a:lnSpc>
-              <a:spcBef>
-                <a:spcPct val="0"/>
-              </a:spcBef>
-              <a:buNone/>
-              <a:defRPr sz="4400" kern="1200">
-                <a:solidFill>
-                  <a:schemeClr val="tx1"/>
-                </a:solidFill>
-                <a:latin typeface="+mj-lt"/>
-                <a:ea typeface="+mj-ea"/>
-                <a:cs typeface="+mj-cs"/>
-              </a:defRPr>
-            </a:lvl1pPr>
-          </a:lstStyle>
-          <a:p>
-            <a:r>
-              <a:rPr lang="vi-VN" sz="2000" dirty="0">
-                <a:latin typeface="+mn-lt"/>
-              </a:rPr>
-              <a:t>Model: Sys + Obs + Envir</a:t>
-            </a:r>
-          </a:p>
-          <a:p>
-            <a:r>
-              <a:rPr lang="vi-VN" sz="2000" dirty="0">
-                <a:latin typeface="+mn-lt"/>
-              </a:rPr>
-              <a:t>  </a:t>
-            </a:r>
-          </a:p>
-          <a:p>
-            <a:pPr marL="342900" indent="-342900">
               <a:buFont typeface="Arial" panose="020B0604020202020204" pitchFamily="34" charset="0"/>
               <a:buChar char="•"/>
             </a:pPr>
             <a:r>
-              <a:rPr lang="vi-VN" sz="2000" dirty="0">
-                <a:latin typeface="+mn-lt"/>
-              </a:rPr>
-              <a:t>Sys + Obs interaction: U(π/3)</a:t>
-            </a:r>
-          </a:p>
-          <a:p>
-            <a:pPr marL="342900" indent="-342900">
+              <a:rPr lang="en-VN" sz="2000" b="1" dirty="0"/>
+              <a:t>Sys-obs interaction: </a:t>
+            </a:r>
+            <a:r>
+              <a:rPr lang="en-VN" sz="2000" dirty="0"/>
+              <a:t>CZ gate</a:t>
+            </a:r>
+          </a:p>
+          <a:p>
+            <a:pPr marL="457200" indent="-457200">
+              <a:lnSpc>
+                <a:spcPct val="150000"/>
+              </a:lnSpc>
               <a:buFont typeface="Arial" panose="020B0604020202020204" pitchFamily="34" charset="0"/>
               <a:buChar char="•"/>
             </a:pPr>
-            <a:endParaRPr lang="vi-VN" sz="2000" dirty="0">
-              <a:latin typeface="+mn-lt"/>
-            </a:endParaRPr>
-          </a:p>
-          <a:p>
-            <a:pPr marL="342900" indent="-342900">
+            <a:r>
+              <a:rPr lang="en-VN" sz="2000" b="1" dirty="0"/>
+              <a:t>Obs-envir interaction: </a:t>
+            </a:r>
+            <a:r>
+              <a:rPr lang="en-VN" sz="2000" dirty="0"/>
+              <a:t>U3 gate</a:t>
+            </a:r>
+          </a:p>
+          <a:p>
+            <a:pPr marL="457200" indent="-457200">
+              <a:lnSpc>
+                <a:spcPct val="150000"/>
+              </a:lnSpc>
               <a:buFont typeface="Arial" panose="020B0604020202020204" pitchFamily="34" charset="0"/>
               <a:buChar char="•"/>
             </a:pPr>
             <a:r>
-              <a:rPr lang="vi-VN" sz="2000" dirty="0">
-                <a:latin typeface="+mn-lt"/>
-              </a:rPr>
-              <a:t>Sys + Envir interacton: U(π/2)</a:t>
-            </a:r>
-          </a:p>
-          <a:p>
-            <a:pPr marL="342900" indent="-342900">
-              <a:buFont typeface="Arial" panose="020B0604020202020204" pitchFamily="34" charset="0"/>
-              <a:buChar char="•"/>
-            </a:pPr>
-            <a:endParaRPr lang="vi-VN" sz="2000" dirty="0">
-              <a:latin typeface="+mn-lt"/>
-            </a:endParaRPr>
-          </a:p>
-        </p:txBody>
-      </p:sp>
-      <p:sp>
-        <p:nvSpPr>
-          <p:cNvPr id="7" name="Title 1">
-            <a:extLst>
-              <a:ext uri="{FF2B5EF4-FFF2-40B4-BE49-F238E27FC236}">
-                <a16:creationId xmlns:a16="http://schemas.microsoft.com/office/drawing/2014/main" id="{08DF9F39-CF68-3EEA-61D7-85AFACE61479}"/>
-              </a:ext>
-            </a:extLst>
-          </p:cNvPr>
-          <p:cNvSpPr txBox="1">
-            <a:spLocks/>
-          </p:cNvSpPr>
-          <p:nvPr/>
-        </p:nvSpPr>
-        <p:spPr>
-          <a:xfrm>
-            <a:off x="138916" y="3886981"/>
-            <a:ext cx="3947662" cy="2133600"/>
-          </a:xfrm>
-          <a:prstGeom prst="rect">
-            <a:avLst/>
-          </a:prstGeom>
-        </p:spPr>
-        <p:txBody>
-          <a:bodyPr vert="horz" lIns="91440" tIns="45720" rIns="91440" bIns="45720" rtlCol="0" anchor="ctr">
-            <a:normAutofit/>
-          </a:bodyPr>
-          <a:lstStyle>
-            <a:lvl1pPr algn="l" defTabSz="914400" rtl="0" eaLnBrk="1" latinLnBrk="0" hangingPunct="1">
-              <a:lnSpc>
-                <a:spcPct val="90000"/>
-              </a:lnSpc>
-              <a:spcBef>
-                <a:spcPct val="0"/>
-              </a:spcBef>
-              <a:buNone/>
-              <a:defRPr sz="4400" kern="1200">
-                <a:solidFill>
-                  <a:schemeClr val="tx1"/>
-                </a:solidFill>
-                <a:latin typeface="+mj-lt"/>
-                <a:ea typeface="+mj-ea"/>
-                <a:cs typeface="+mj-cs"/>
-              </a:defRPr>
-            </a:lvl1pPr>
-          </a:lstStyle>
-          <a:p>
-            <a:r>
-              <a:rPr lang="vi-VN" sz="2000" dirty="0">
-                <a:latin typeface="+mn-lt"/>
-              </a:rPr>
-              <a:t>Model: Sys + Obs + Envir</a:t>
-            </a:r>
-          </a:p>
-          <a:p>
-            <a:endParaRPr lang="vi-VN" sz="2000" dirty="0">
-              <a:latin typeface="+mn-lt"/>
-            </a:endParaRPr>
-          </a:p>
-          <a:p>
-            <a:pPr marL="342900" indent="-342900">
-              <a:buFont typeface="Arial" panose="020B0604020202020204" pitchFamily="34" charset="0"/>
-              <a:buChar char="•"/>
-            </a:pPr>
-            <a:r>
-              <a:rPr lang="vi-VN" sz="2000" dirty="0">
-                <a:latin typeface="+mn-lt"/>
-              </a:rPr>
-              <a:t>Sys + Obs interaction: U(π/2)</a:t>
-            </a:r>
-          </a:p>
-          <a:p>
-            <a:pPr marL="342900" indent="-342900">
-              <a:buFont typeface="Arial" panose="020B0604020202020204" pitchFamily="34" charset="0"/>
-              <a:buChar char="•"/>
-            </a:pPr>
-            <a:endParaRPr lang="vi-VN" sz="2000" dirty="0">
-              <a:latin typeface="+mn-lt"/>
-            </a:endParaRPr>
-          </a:p>
-          <a:p>
-            <a:pPr marL="342900" indent="-342900">
-              <a:buFont typeface="Arial" panose="020B0604020202020204" pitchFamily="34" charset="0"/>
-              <a:buChar char="•"/>
-            </a:pPr>
-            <a:r>
-              <a:rPr lang="vi-VN" sz="2000" dirty="0">
-                <a:latin typeface="+mn-lt"/>
-              </a:rPr>
-              <a:t>Sys + Envir interacton: Toffoli</a:t>
-            </a:r>
-          </a:p>
-          <a:p>
-            <a:endParaRPr lang="en-US" sz="2000" dirty="0">
-              <a:latin typeface="+mn-lt"/>
-            </a:endParaRPr>
+              <a:rPr lang="en-VN" sz="2000" b="1" dirty="0"/>
+              <a:t>3D simulation: </a:t>
+            </a:r>
+            <a:r>
+              <a:rPr lang="en-VN" sz="2000" dirty="0"/>
+              <a:t>varying θ</a:t>
+            </a:r>
           </a:p>
         </p:txBody>
       </p:sp>
     </p:spTree>
     <p:extLst>
       <p:ext uri="{BB962C8B-B14F-4D97-AF65-F5344CB8AC3E}">
-        <p14:creationId xmlns:p14="http://schemas.microsoft.com/office/powerpoint/2010/main" val="4172777296"/>
+        <p14:creationId xmlns:p14="http://schemas.microsoft.com/office/powerpoint/2010/main" val="162275607"/>
       </p:ext>
     </p:extLst>
   </p:cSld>
@@ -4602,104 +4536,32 @@
           <a:chExt cx="0" cy="0"/>
         </a:xfrm>
       </p:grpSpPr>
-      <p:pic>
-        <p:nvPicPr>
-          <p:cNvPr id="2" name="Picture 1">
-            <a:extLst>
-              <a:ext uri="{FF2B5EF4-FFF2-40B4-BE49-F238E27FC236}">
-                <a16:creationId xmlns:a16="http://schemas.microsoft.com/office/drawing/2014/main" id="{283B7E99-BE3C-062A-8AFF-3668F27CE32C}"/>
-              </a:ext>
-            </a:extLst>
-          </p:cNvPr>
-          <p:cNvPicPr>
-            <a:picLocks noChangeAspect="1"/>
-          </p:cNvPicPr>
+      <p:sp>
+        <p:nvSpPr>
+          <p:cNvPr id="7" name="Title 1">
+            <a:extLst>
+              <a:ext uri="{FF2B5EF4-FFF2-40B4-BE49-F238E27FC236}">
+                <a16:creationId xmlns:a16="http://schemas.microsoft.com/office/drawing/2014/main" id="{15954FBF-432A-161C-633F-A940344986E6}"/>
+              </a:ext>
+            </a:extLst>
+          </p:cNvPr>
+          <p:cNvSpPr txBox="1">
+            <a:spLocks/>
+          </p:cNvSpPr>
           <p:nvPr/>
-        </p:nvPicPr>
-        <p:blipFill>
-          <a:blip r:embed="rId2"/>
-          <a:stretch>
-            <a:fillRect/>
-          </a:stretch>
-        </p:blipFill>
+        </p:nvSpPr>
         <p:spPr>
           <a:xfrm>
-            <a:off x="417687" y="1095022"/>
-            <a:ext cx="6750560" cy="5594746"/>
+            <a:off x="431669" y="1345676"/>
+            <a:ext cx="6008918" cy="926648"/>
           </a:xfrm>
           <a:prstGeom prst="rect">
             <a:avLst/>
           </a:prstGeom>
         </p:spPr>
-      </p:pic>
-      <p:cxnSp>
-        <p:nvCxnSpPr>
-          <p:cNvPr id="4" name="Straight Arrow Connector 3">
-            <a:extLst>
-              <a:ext uri="{FF2B5EF4-FFF2-40B4-BE49-F238E27FC236}">
-                <a16:creationId xmlns:a16="http://schemas.microsoft.com/office/drawing/2014/main" id="{53041076-DA2E-5963-F58D-44C9E50035A4}"/>
-              </a:ext>
-            </a:extLst>
-          </p:cNvPr>
-          <p:cNvCxnSpPr>
-            <a:cxnSpLocks/>
-            <a:stCxn id="8" idx="1"/>
-          </p:cNvCxnSpPr>
-          <p:nvPr/>
-        </p:nvCxnSpPr>
-        <p:spPr>
-          <a:xfrm flipH="1">
-            <a:off x="6299200" y="1606234"/>
-            <a:ext cx="1617761" cy="1362743"/>
-          </a:xfrm>
-          <a:prstGeom prst="straightConnector1">
-            <a:avLst/>
-          </a:prstGeom>
-          <a:ln>
-            <a:tailEnd type="triangle"/>
-          </a:ln>
-        </p:spPr>
-        <p:style>
-          <a:lnRef idx="2">
-            <a:schemeClr val="dk1"/>
-          </a:lnRef>
-          <a:fillRef idx="0">
-            <a:schemeClr val="dk1"/>
-          </a:fillRef>
-          <a:effectRef idx="1">
-            <a:schemeClr val="dk1"/>
-          </a:effectRef>
-          <a:fontRef idx="minor">
-            <a:schemeClr val="tx1"/>
-          </a:fontRef>
-        </p:style>
-      </p:cxnSp>
-      <p:sp>
-        <p:nvSpPr>
-          <p:cNvPr id="8" name="Title 1">
-            <a:extLst>
-              <a:ext uri="{FF2B5EF4-FFF2-40B4-BE49-F238E27FC236}">
-                <a16:creationId xmlns:a16="http://schemas.microsoft.com/office/drawing/2014/main" id="{3F5ECC45-4956-5576-87F0-23DA6FE9038E}"/>
-              </a:ext>
-            </a:extLst>
-          </p:cNvPr>
-          <p:cNvSpPr txBox="1">
-            <a:spLocks/>
-          </p:cNvSpPr>
-          <p:nvPr/>
-        </p:nvSpPr>
-        <p:spPr>
-          <a:xfrm>
-            <a:off x="7916961" y="1236913"/>
-            <a:ext cx="1949528" cy="738642"/>
-          </a:xfrm>
-          <a:prstGeom prst="rect">
-            <a:avLst/>
-          </a:prstGeom>
-        </p:spPr>
         <p:txBody>
           <a:bodyPr vert="horz" lIns="91440" tIns="45720" rIns="91440" bIns="45720" rtlCol="0" anchor="ctr">
-            <a:normAutofit/>
+            <a:normAutofit lnSpcReduction="10000"/>
           </a:bodyPr>
           <a:lstStyle>
             <a:lvl1pPr algn="l" defTabSz="914400" rtl="0" eaLnBrk="1" latinLnBrk="0" hangingPunct="1">
@@ -4721,1176 +4583,31 @@
             </a:lvl1pPr>
           </a:lstStyle>
           <a:p>
-            <a:r>
-              <a:rPr lang="vi-VN" sz="2000" b="1" dirty="0">
-                <a:latin typeface="+mn-lt"/>
+            <a:pPr algn="ctr"/>
+            <a:r>
+              <a:rPr lang="en-US" sz="3200" b="1" dirty="0">
+                <a:latin typeface="Arial" panose="020B0604020202020204" pitchFamily="34" charset="0"/>
+                <a:cs typeface="Arial" panose="020B0604020202020204" pitchFamily="34" charset="0"/>
               </a:rPr>
-              <a:t>No observer</a:t>
-            </a:r>
-            <a:endParaRPr lang="en-US" sz="2000" b="1" dirty="0">
-              <a:latin typeface="+mn-lt"/>
-            </a:endParaRPr>
-          </a:p>
-        </p:txBody>
-      </p:sp>
-      <p:cxnSp>
-        <p:nvCxnSpPr>
-          <p:cNvPr id="12" name="Straight Arrow Connector 11">
-            <a:extLst>
-              <a:ext uri="{FF2B5EF4-FFF2-40B4-BE49-F238E27FC236}">
-                <a16:creationId xmlns:a16="http://schemas.microsoft.com/office/drawing/2014/main" id="{7F5DBCD9-EF7F-33D0-3B9B-B1DAF6DD7139}"/>
-              </a:ext>
-            </a:extLst>
-          </p:cNvPr>
-          <p:cNvCxnSpPr>
-            <a:cxnSpLocks/>
-            <a:stCxn id="13" idx="1"/>
-          </p:cNvCxnSpPr>
-          <p:nvPr/>
-        </p:nvCxnSpPr>
-        <p:spPr>
-          <a:xfrm flipH="1">
-            <a:off x="7608711" y="2714197"/>
-            <a:ext cx="1363762" cy="1530425"/>
-          </a:xfrm>
-          <a:prstGeom prst="straightConnector1">
-            <a:avLst/>
-          </a:prstGeom>
-          <a:ln>
-            <a:tailEnd type="triangle"/>
-          </a:ln>
-        </p:spPr>
-        <p:style>
-          <a:lnRef idx="2">
-            <a:schemeClr val="dk1"/>
-          </a:lnRef>
-          <a:fillRef idx="0">
-            <a:schemeClr val="dk1"/>
-          </a:fillRef>
-          <a:effectRef idx="1">
-            <a:schemeClr val="dk1"/>
-          </a:effectRef>
-          <a:fontRef idx="minor">
-            <a:schemeClr val="tx1"/>
-          </a:fontRef>
-        </p:style>
-      </p:cxnSp>
-      <p:sp>
-        <p:nvSpPr>
-          <p:cNvPr id="13" name="Title 1">
-            <a:extLst>
-              <a:ext uri="{FF2B5EF4-FFF2-40B4-BE49-F238E27FC236}">
-                <a16:creationId xmlns:a16="http://schemas.microsoft.com/office/drawing/2014/main" id="{BA714356-B32D-13D6-4C1D-3AB2B1480A9B}"/>
-              </a:ext>
-            </a:extLst>
-          </p:cNvPr>
-          <p:cNvSpPr txBox="1">
-            <a:spLocks/>
-          </p:cNvSpPr>
-          <p:nvPr/>
-        </p:nvSpPr>
-        <p:spPr>
-          <a:xfrm>
-            <a:off x="8972473" y="2344876"/>
-            <a:ext cx="1949528" cy="738642"/>
-          </a:xfrm>
-          <a:prstGeom prst="rect">
-            <a:avLst/>
-          </a:prstGeom>
-        </p:spPr>
-        <p:txBody>
-          <a:bodyPr vert="horz" lIns="91440" tIns="45720" rIns="91440" bIns="45720" rtlCol="0" anchor="ctr">
-            <a:normAutofit/>
-          </a:bodyPr>
-          <a:lstStyle>
-            <a:lvl1pPr algn="l" defTabSz="914400" rtl="0" eaLnBrk="1" latinLnBrk="0" hangingPunct="1">
-              <a:lnSpc>
-                <a:spcPct val="90000"/>
-              </a:lnSpc>
-              <a:spcBef>
-                <a:spcPct val="0"/>
-              </a:spcBef>
-              <a:buNone/>
-              <a:defRPr sz="4400" kern="1200">
-                <a:solidFill>
-                  <a:schemeClr val="tx1"/>
-                </a:solidFill>
-                <a:latin typeface="+mj-lt"/>
-                <a:ea typeface="+mj-ea"/>
-                <a:cs typeface="+mj-cs"/>
-              </a:defRPr>
-            </a:lvl1pPr>
-          </a:lstStyle>
-          <a:p>
-            <a:r>
-              <a:rPr lang="vi-VN" sz="2000" b="1" dirty="0">
-                <a:latin typeface="+mn-lt"/>
+              <a:t>Modified scenario (QMI): </a:t>
+            </a:r>
+          </a:p>
+          <a:p>
+            <a:pPr algn="ctr"/>
+            <a:r>
+              <a:rPr lang="en-US" sz="3200" b="1" dirty="0">
+                <a:latin typeface="Arial" panose="020B0604020202020204" pitchFamily="34" charset="0"/>
+                <a:cs typeface="Arial" panose="020B0604020202020204" pitchFamily="34" charset="0"/>
               </a:rPr>
-              <a:t>With observer</a:t>
-            </a:r>
-            <a:endParaRPr lang="en-US" sz="2000" b="1" dirty="0">
-              <a:latin typeface="+mn-lt"/>
-            </a:endParaRPr>
-          </a:p>
-        </p:txBody>
-      </p:sp>
-      <p:sp>
-        <p:nvSpPr>
-          <p:cNvPr id="14" name="Right Brace 13">
-            <a:extLst>
-              <a:ext uri="{FF2B5EF4-FFF2-40B4-BE49-F238E27FC236}">
-                <a16:creationId xmlns:a16="http://schemas.microsoft.com/office/drawing/2014/main" id="{04F6E110-47C3-E9F2-71D0-D6E2582BAF9E}"/>
-              </a:ext>
-            </a:extLst>
-          </p:cNvPr>
-          <p:cNvSpPr/>
-          <p:nvPr/>
-        </p:nvSpPr>
-        <p:spPr>
-          <a:xfrm>
-            <a:off x="7168246" y="3770489"/>
-            <a:ext cx="350153" cy="914400"/>
-          </a:xfrm>
-          <a:prstGeom prst="rightBrace">
-            <a:avLst>
-              <a:gd name="adj1" fmla="val 43797"/>
-              <a:gd name="adj2" fmla="val 50000"/>
-            </a:avLst>
-          </a:prstGeom>
-        </p:spPr>
-        <p:style>
-          <a:lnRef idx="2">
-            <a:schemeClr val="dk1"/>
-          </a:lnRef>
-          <a:fillRef idx="0">
-            <a:schemeClr val="dk1"/>
-          </a:fillRef>
-          <a:effectRef idx="1">
-            <a:schemeClr val="dk1"/>
-          </a:effectRef>
-          <a:fontRef idx="minor">
-            <a:schemeClr val="tx1"/>
-          </a:fontRef>
-        </p:style>
-        <p:txBody>
-          <a:bodyPr rtlCol="0" anchor="ctr"/>
-          <a:lstStyle/>
-          <a:p>
-            <a:pPr algn="ctr"/>
-            <a:endParaRPr lang="en-VN"/>
-          </a:p>
-        </p:txBody>
-      </p:sp>
-      <p:sp>
-        <p:nvSpPr>
-          <p:cNvPr id="17" name="Title 1">
-            <a:extLst>
-              <a:ext uri="{FF2B5EF4-FFF2-40B4-BE49-F238E27FC236}">
-                <a16:creationId xmlns:a16="http://schemas.microsoft.com/office/drawing/2014/main" id="{BC2530C9-8D94-3BE2-04B1-77F67C01AD62}"/>
-              </a:ext>
-            </a:extLst>
-          </p:cNvPr>
-          <p:cNvSpPr txBox="1">
-            <a:spLocks/>
-          </p:cNvSpPr>
-          <p:nvPr/>
-        </p:nvSpPr>
-        <p:spPr>
-          <a:xfrm>
-            <a:off x="519290" y="168232"/>
-            <a:ext cx="10634132" cy="738642"/>
-          </a:xfrm>
-          <a:prstGeom prst="rect">
-            <a:avLst/>
-          </a:prstGeom>
-        </p:spPr>
-        <p:txBody>
-          <a:bodyPr vert="horz" lIns="91440" tIns="45720" rIns="91440" bIns="45720" rtlCol="0" anchor="ctr">
-            <a:normAutofit/>
-          </a:bodyPr>
-          <a:lstStyle>
-            <a:lvl1pPr algn="l" defTabSz="914400" rtl="0" eaLnBrk="1" latinLnBrk="0" hangingPunct="1">
-              <a:lnSpc>
-                <a:spcPct val="90000"/>
-              </a:lnSpc>
-              <a:spcBef>
-                <a:spcPct val="0"/>
-              </a:spcBef>
-              <a:buNone/>
-              <a:defRPr sz="4400" kern="1200">
-                <a:solidFill>
-                  <a:schemeClr val="tx1"/>
-                </a:solidFill>
-                <a:latin typeface="+mj-lt"/>
-                <a:ea typeface="+mj-ea"/>
-                <a:cs typeface="+mj-cs"/>
-              </a:defRPr>
-            </a:lvl1pPr>
-          </a:lstStyle>
-          <a:p>
-            <a:pPr algn="ctr"/>
-            <a:r>
-              <a:rPr lang="vi-VN" sz="2000" b="1" dirty="0">
-                <a:latin typeface="+mn-lt"/>
-              </a:rPr>
-              <a:t>Quantum mutual information in different models and interaction types</a:t>
-            </a:r>
-            <a:endParaRPr lang="en-US" sz="2000" b="1" dirty="0">
-              <a:latin typeface="+mn-lt"/>
-            </a:endParaRPr>
+              <a:t>Sys + Obs + Envir </a:t>
+            </a:r>
           </a:p>
         </p:txBody>
       </p:sp>
     </p:spTree>
     <p:extLst>
       <p:ext uri="{BB962C8B-B14F-4D97-AF65-F5344CB8AC3E}">
-        <p14:creationId xmlns:p14="http://schemas.microsoft.com/office/powerpoint/2010/main" val="1319346245"/>
-      </p:ext>
-    </p:extLst>
-  </p:cSld>
-  <p:clrMapOvr>
-    <a:masterClrMapping/>
-  </p:clrMapOvr>
-</p:sld>
-</file>
-
-<file path=ppt/slides/slide5.xml><?xml version="1.0" encoding="utf-8"?>
-<p:sld xmlns:a="http://schemas.openxmlformats.org/drawingml/2006/main" xmlns:r="http://schemas.openxmlformats.org/officeDocument/2006/relationships" xmlns:p="http://schemas.openxmlformats.org/presentationml/2006/main">
-  <p:cSld>
-    <p:spTree>
-      <p:nvGrpSpPr>
-        <p:cNvPr id="1" name=""/>
-        <p:cNvGrpSpPr/>
-        <p:nvPr/>
-      </p:nvGrpSpPr>
-      <p:grpSpPr>
-        <a:xfrm>
-          <a:off x="0" y="0"/>
-          <a:ext cx="0" cy="0"/>
-          <a:chOff x="0" y="0"/>
-          <a:chExt cx="0" cy="0"/>
-        </a:xfrm>
-      </p:grpSpPr>
-      <p:pic>
-        <p:nvPicPr>
-          <p:cNvPr id="8" name="Picture 7">
-            <a:extLst>
-              <a:ext uri="{FF2B5EF4-FFF2-40B4-BE49-F238E27FC236}">
-                <a16:creationId xmlns:a16="http://schemas.microsoft.com/office/drawing/2014/main" id="{3FC77D1E-B385-1F42-7D7B-6CA502BC43D2}"/>
-              </a:ext>
-            </a:extLst>
-          </p:cNvPr>
-          <p:cNvPicPr>
-            <a:picLocks noChangeAspect="1"/>
-          </p:cNvPicPr>
-          <p:nvPr/>
-        </p:nvPicPr>
-        <p:blipFill>
-          <a:blip r:embed="rId2"/>
-          <a:stretch>
-            <a:fillRect/>
-          </a:stretch>
-        </p:blipFill>
-        <p:spPr>
-          <a:xfrm>
-            <a:off x="6417104" y="1522535"/>
-            <a:ext cx="5041900" cy="4216400"/>
-          </a:xfrm>
-          <a:prstGeom prst="rect">
-            <a:avLst/>
-          </a:prstGeom>
-        </p:spPr>
-      </p:pic>
-      <p:pic>
-        <p:nvPicPr>
-          <p:cNvPr id="9" name="Picture 8">
-            <a:extLst>
-              <a:ext uri="{FF2B5EF4-FFF2-40B4-BE49-F238E27FC236}">
-                <a16:creationId xmlns:a16="http://schemas.microsoft.com/office/drawing/2014/main" id="{F3A224EC-6331-ED28-5E7E-C023D78E9F7B}"/>
-              </a:ext>
-            </a:extLst>
-          </p:cNvPr>
-          <p:cNvPicPr>
-            <a:picLocks noChangeAspect="1"/>
-          </p:cNvPicPr>
-          <p:nvPr/>
-        </p:nvPicPr>
-        <p:blipFill>
-          <a:blip r:embed="rId3"/>
-          <a:stretch>
-            <a:fillRect/>
-          </a:stretch>
-        </p:blipFill>
-        <p:spPr>
-          <a:xfrm>
-            <a:off x="1117600" y="1522535"/>
-            <a:ext cx="4978400" cy="4216400"/>
-          </a:xfrm>
-          <a:prstGeom prst="rect">
-            <a:avLst/>
-          </a:prstGeom>
-        </p:spPr>
-      </p:pic>
-      <p:sp>
-        <p:nvSpPr>
-          <p:cNvPr id="10" name="AutoShape 2">
-            <a:extLst>
-              <a:ext uri="{FF2B5EF4-FFF2-40B4-BE49-F238E27FC236}">
-                <a16:creationId xmlns:a16="http://schemas.microsoft.com/office/drawing/2014/main" id="{77D8D092-1C11-2905-AE4A-6874CB54B081}"/>
-              </a:ext>
-            </a:extLst>
-          </p:cNvPr>
-          <p:cNvSpPr>
-            <a:spLocks noChangeAspect="1" noChangeArrowheads="1"/>
-          </p:cNvSpPr>
-          <p:nvPr/>
-        </p:nvSpPr>
-        <p:spPr bwMode="auto">
-          <a:xfrm>
-            <a:off x="5943600" y="3276600"/>
-            <a:ext cx="304800" cy="304800"/>
-          </a:xfrm>
-          <a:prstGeom prst="rect">
-            <a:avLst/>
-          </a:prstGeom>
-          <a:noFill/>
-          <a:extLst>
-            <a:ext uri="{909E8E84-426E-40DD-AFC4-6F175D3DCCD1}">
-              <a14:hiddenFill xmlns:a14="http://schemas.microsoft.com/office/drawing/2010/main">
-                <a:solidFill>
-                  <a:srgbClr val="FFFFFF"/>
-                </a:solidFill>
-              </a14:hiddenFill>
-            </a:ext>
-          </a:extLst>
-        </p:spPr>
-        <p:txBody>
-          <a:bodyPr vert="horz" wrap="square" lIns="91440" tIns="45720" rIns="91440" bIns="45720" numCol="1" anchor="t" anchorCtr="0" compatLnSpc="1">
-            <a:prstTxWarp prst="textNoShape">
-              <a:avLst/>
-            </a:prstTxWarp>
-          </a:bodyPr>
-          <a:lstStyle/>
-          <a:p>
-            <a:endParaRPr lang="en-VN"/>
-          </a:p>
-        </p:txBody>
-      </p:sp>
-      <p:sp>
-        <p:nvSpPr>
-          <p:cNvPr id="11" name="AutoShape 4">
-            <a:extLst>
-              <a:ext uri="{FF2B5EF4-FFF2-40B4-BE49-F238E27FC236}">
-                <a16:creationId xmlns:a16="http://schemas.microsoft.com/office/drawing/2014/main" id="{E2A1763D-125C-E879-5AB7-6CB7432886AA}"/>
-              </a:ext>
-            </a:extLst>
-          </p:cNvPr>
-          <p:cNvSpPr>
-            <a:spLocks noChangeAspect="1" noChangeArrowheads="1"/>
-          </p:cNvSpPr>
-          <p:nvPr/>
-        </p:nvSpPr>
-        <p:spPr bwMode="auto">
-          <a:xfrm>
-            <a:off x="6096000" y="3429000"/>
-            <a:ext cx="304800" cy="304800"/>
-          </a:xfrm>
-          <a:prstGeom prst="rect">
-            <a:avLst/>
-          </a:prstGeom>
-          <a:noFill/>
-          <a:extLst>
-            <a:ext uri="{909E8E84-426E-40DD-AFC4-6F175D3DCCD1}">
-              <a14:hiddenFill xmlns:a14="http://schemas.microsoft.com/office/drawing/2010/main">
-                <a:solidFill>
-                  <a:srgbClr val="FFFFFF"/>
-                </a:solidFill>
-              </a14:hiddenFill>
-            </a:ext>
-          </a:extLst>
-        </p:spPr>
-        <p:txBody>
-          <a:bodyPr vert="horz" wrap="square" lIns="91440" tIns="45720" rIns="91440" bIns="45720" numCol="1" anchor="t" anchorCtr="0" compatLnSpc="1">
-            <a:prstTxWarp prst="textNoShape">
-              <a:avLst/>
-            </a:prstTxWarp>
-          </a:bodyPr>
-          <a:lstStyle/>
-          <a:p>
-            <a:endParaRPr lang="en-VN"/>
-          </a:p>
-        </p:txBody>
-      </p:sp>
-      <p:sp>
-        <p:nvSpPr>
-          <p:cNvPr id="2" name="Title 1">
-            <a:extLst>
-              <a:ext uri="{FF2B5EF4-FFF2-40B4-BE49-F238E27FC236}">
-                <a16:creationId xmlns:a16="http://schemas.microsoft.com/office/drawing/2014/main" id="{5E1FA1C2-2CC4-7ACF-EAF1-185094B8863E}"/>
-              </a:ext>
-            </a:extLst>
-          </p:cNvPr>
-          <p:cNvSpPr txBox="1">
-            <a:spLocks/>
-          </p:cNvSpPr>
-          <p:nvPr/>
-        </p:nvSpPr>
-        <p:spPr>
-          <a:xfrm>
-            <a:off x="519290" y="168232"/>
-            <a:ext cx="10634132" cy="738642"/>
-          </a:xfrm>
-          <a:prstGeom prst="rect">
-            <a:avLst/>
-          </a:prstGeom>
-        </p:spPr>
-        <p:txBody>
-          <a:bodyPr vert="horz" lIns="91440" tIns="45720" rIns="91440" bIns="45720" rtlCol="0" anchor="ctr">
-            <a:normAutofit/>
-          </a:bodyPr>
-          <a:lstStyle>
-            <a:lvl1pPr algn="l" defTabSz="914400" rtl="0" eaLnBrk="1" latinLnBrk="0" hangingPunct="1">
-              <a:lnSpc>
-                <a:spcPct val="90000"/>
-              </a:lnSpc>
-              <a:spcBef>
-                <a:spcPct val="0"/>
-              </a:spcBef>
-              <a:buNone/>
-              <a:defRPr sz="4400" kern="1200">
-                <a:solidFill>
-                  <a:schemeClr val="tx1"/>
-                </a:solidFill>
-                <a:latin typeface="+mj-lt"/>
-                <a:ea typeface="+mj-ea"/>
-                <a:cs typeface="+mj-cs"/>
-              </a:defRPr>
-            </a:lvl1pPr>
-          </a:lstStyle>
-          <a:p>
-            <a:pPr algn="ctr"/>
-            <a:r>
-              <a:rPr lang="vi-VN" sz="2000" b="1" dirty="0">
-                <a:latin typeface="+mn-lt"/>
-              </a:rPr>
-              <a:t>Quantum mutual information by varying theta ( Y-axis rotation)</a:t>
-            </a:r>
-            <a:endParaRPr lang="en-US" sz="2000" b="1" dirty="0">
-              <a:latin typeface="+mn-lt"/>
-            </a:endParaRPr>
-          </a:p>
-        </p:txBody>
-      </p:sp>
-    </p:spTree>
-    <p:extLst>
-      <p:ext uri="{BB962C8B-B14F-4D97-AF65-F5344CB8AC3E}">
-        <p14:creationId xmlns:p14="http://schemas.microsoft.com/office/powerpoint/2010/main" val="2658197600"/>
-      </p:ext>
-    </p:extLst>
-  </p:cSld>
-  <p:clrMapOvr>
-    <a:masterClrMapping/>
-  </p:clrMapOvr>
-</p:sld>
-</file>
-
-<file path=ppt/slides/slide6.xml><?xml version="1.0" encoding="utf-8"?>
-<p:sld xmlns:a="http://schemas.openxmlformats.org/drawingml/2006/main" xmlns:r="http://schemas.openxmlformats.org/officeDocument/2006/relationships" xmlns:p="http://schemas.openxmlformats.org/presentationml/2006/main">
-  <p:cSld>
-    <p:spTree>
-      <p:nvGrpSpPr>
-        <p:cNvPr id="1" name=""/>
-        <p:cNvGrpSpPr/>
-        <p:nvPr/>
-      </p:nvGrpSpPr>
-      <p:grpSpPr>
-        <a:xfrm>
-          <a:off x="0" y="0"/>
-          <a:ext cx="0" cy="0"/>
-          <a:chOff x="0" y="0"/>
-          <a:chExt cx="0" cy="0"/>
-        </a:xfrm>
-      </p:grpSpPr>
-      <p:pic>
-        <p:nvPicPr>
-          <p:cNvPr id="2" name="Picture 1">
-            <a:extLst>
-              <a:ext uri="{FF2B5EF4-FFF2-40B4-BE49-F238E27FC236}">
-                <a16:creationId xmlns:a16="http://schemas.microsoft.com/office/drawing/2014/main" id="{56FF7A6E-AB50-78D6-C3BC-A046BAEAAC71}"/>
-              </a:ext>
-            </a:extLst>
-          </p:cNvPr>
-          <p:cNvPicPr>
-            <a:picLocks noChangeAspect="1"/>
-          </p:cNvPicPr>
-          <p:nvPr/>
-        </p:nvPicPr>
-        <p:blipFill>
-          <a:blip r:embed="rId2"/>
-          <a:stretch>
-            <a:fillRect/>
-          </a:stretch>
-        </p:blipFill>
-        <p:spPr>
-          <a:xfrm>
-            <a:off x="568153" y="812800"/>
-            <a:ext cx="11055694" cy="4138749"/>
-          </a:xfrm>
-          <a:prstGeom prst="rect">
-            <a:avLst/>
-          </a:prstGeom>
-        </p:spPr>
-      </p:pic>
-    </p:spTree>
-    <p:extLst>
-      <p:ext uri="{BB962C8B-B14F-4D97-AF65-F5344CB8AC3E}">
-        <p14:creationId xmlns:p14="http://schemas.microsoft.com/office/powerpoint/2010/main" val="480027262"/>
-      </p:ext>
-    </p:extLst>
-  </p:cSld>
-  <p:clrMapOvr>
-    <a:masterClrMapping/>
-  </p:clrMapOvr>
-</p:sld>
-</file>
-
-<file path=ppt/slides/slide7.xml><?xml version="1.0" encoding="utf-8"?>
-<p:sld xmlns:a="http://schemas.openxmlformats.org/drawingml/2006/main" xmlns:r="http://schemas.openxmlformats.org/officeDocument/2006/relationships" xmlns:p="http://schemas.openxmlformats.org/presentationml/2006/main">
-  <p:cSld>
-    <p:spTree>
-      <p:nvGrpSpPr>
-        <p:cNvPr id="1" name=""/>
-        <p:cNvGrpSpPr/>
-        <p:nvPr/>
-      </p:nvGrpSpPr>
-      <p:grpSpPr>
-        <a:xfrm>
-          <a:off x="0" y="0"/>
-          <a:ext cx="0" cy="0"/>
-          <a:chOff x="0" y="0"/>
-          <a:chExt cx="0" cy="0"/>
-        </a:xfrm>
-      </p:grpSpPr>
-      <p:pic>
-        <p:nvPicPr>
-          <p:cNvPr id="2" name="Picture 1">
-            <a:extLst>
-              <a:ext uri="{FF2B5EF4-FFF2-40B4-BE49-F238E27FC236}">
-                <a16:creationId xmlns:a16="http://schemas.microsoft.com/office/drawing/2014/main" id="{648B630A-8DFE-73F0-9184-5F8EE48F2091}"/>
-              </a:ext>
-            </a:extLst>
-          </p:cNvPr>
-          <p:cNvPicPr>
-            <a:picLocks noChangeAspect="1"/>
-          </p:cNvPicPr>
-          <p:nvPr/>
-        </p:nvPicPr>
-        <p:blipFill>
-          <a:blip r:embed="rId3"/>
-          <a:stretch>
-            <a:fillRect/>
-          </a:stretch>
-        </p:blipFill>
-        <p:spPr>
-          <a:xfrm>
-            <a:off x="257527" y="1238250"/>
-            <a:ext cx="5836845" cy="5098004"/>
-          </a:xfrm>
-          <a:prstGeom prst="rect">
-            <a:avLst/>
-          </a:prstGeom>
-        </p:spPr>
-      </p:pic>
-      <p:sp>
-        <p:nvSpPr>
-          <p:cNvPr id="3" name="Title 1">
-            <a:extLst>
-              <a:ext uri="{FF2B5EF4-FFF2-40B4-BE49-F238E27FC236}">
-                <a16:creationId xmlns:a16="http://schemas.microsoft.com/office/drawing/2014/main" id="{F5C21418-997D-FA3A-F6CA-C99994E0DFEE}"/>
-              </a:ext>
-            </a:extLst>
-          </p:cNvPr>
-          <p:cNvSpPr txBox="1">
-            <a:spLocks/>
-          </p:cNvSpPr>
-          <p:nvPr/>
-        </p:nvSpPr>
-        <p:spPr>
-          <a:xfrm>
-            <a:off x="3646186" y="3734939"/>
-            <a:ext cx="9189866" cy="838123"/>
-          </a:xfrm>
-          <a:prstGeom prst="rect">
-            <a:avLst/>
-          </a:prstGeom>
-        </p:spPr>
-        <p:txBody>
-          <a:bodyPr vert="horz" lIns="91440" tIns="45720" rIns="91440" bIns="45720" rtlCol="0" anchor="ctr">
-            <a:normAutofit/>
-          </a:bodyPr>
-          <a:lstStyle>
-            <a:lvl1pPr algn="l" defTabSz="914400" rtl="0" eaLnBrk="1" latinLnBrk="0" hangingPunct="1">
-              <a:lnSpc>
-                <a:spcPct val="90000"/>
-              </a:lnSpc>
-              <a:spcBef>
-                <a:spcPct val="0"/>
-              </a:spcBef>
-              <a:buNone/>
-              <a:defRPr sz="4400" kern="1200">
-                <a:solidFill>
-                  <a:schemeClr val="tx1"/>
-                </a:solidFill>
-                <a:latin typeface="+mj-lt"/>
-                <a:ea typeface="+mj-ea"/>
-                <a:cs typeface="+mj-cs"/>
-              </a:defRPr>
-            </a:lvl1pPr>
-          </a:lstStyle>
-          <a:p>
-            <a:endParaRPr lang="en-US" dirty="0"/>
-          </a:p>
-        </p:txBody>
-      </p:sp>
-      <p:cxnSp>
-        <p:nvCxnSpPr>
-          <p:cNvPr id="6" name="Straight Arrow Connector 5">
-            <a:extLst>
-              <a:ext uri="{FF2B5EF4-FFF2-40B4-BE49-F238E27FC236}">
-                <a16:creationId xmlns:a16="http://schemas.microsoft.com/office/drawing/2014/main" id="{3D549A3E-1B89-0975-22BF-678CCE5DAF5A}"/>
-              </a:ext>
-            </a:extLst>
-          </p:cNvPr>
-          <p:cNvCxnSpPr>
-            <a:cxnSpLocks/>
-            <a:stCxn id="10" idx="1"/>
-          </p:cNvCxnSpPr>
-          <p:nvPr/>
-        </p:nvCxnSpPr>
-        <p:spPr>
-          <a:xfrm flipH="1">
-            <a:off x="5464885" y="1872950"/>
-            <a:ext cx="1237129" cy="1779726"/>
-          </a:xfrm>
-          <a:prstGeom prst="straightConnector1">
-            <a:avLst/>
-          </a:prstGeom>
-          <a:ln w="28575">
-            <a:tailEnd type="triangle"/>
-          </a:ln>
-        </p:spPr>
-        <p:style>
-          <a:lnRef idx="2">
-            <a:schemeClr val="dk1"/>
-          </a:lnRef>
-          <a:fillRef idx="0">
-            <a:schemeClr val="dk1"/>
-          </a:fillRef>
-          <a:effectRef idx="1">
-            <a:schemeClr val="dk1"/>
-          </a:effectRef>
-          <a:fontRef idx="minor">
-            <a:schemeClr val="tx1"/>
-          </a:fontRef>
-        </p:style>
-      </p:cxnSp>
-      <p:pic>
-        <p:nvPicPr>
-          <p:cNvPr id="10" name="Picture 9">
-            <a:extLst>
-              <a:ext uri="{FF2B5EF4-FFF2-40B4-BE49-F238E27FC236}">
-                <a16:creationId xmlns:a16="http://schemas.microsoft.com/office/drawing/2014/main" id="{D4589D71-968A-7DF4-57C3-96D23685AAE3}"/>
-              </a:ext>
-            </a:extLst>
-          </p:cNvPr>
-          <p:cNvPicPr>
-            <a:picLocks noChangeAspect="1"/>
-          </p:cNvPicPr>
-          <p:nvPr/>
-        </p:nvPicPr>
-        <p:blipFill>
-          <a:blip r:embed="rId4"/>
-          <a:stretch>
-            <a:fillRect/>
-          </a:stretch>
-        </p:blipFill>
-        <p:spPr>
-          <a:xfrm>
-            <a:off x="6702014" y="1510241"/>
-            <a:ext cx="4346090" cy="725418"/>
-          </a:xfrm>
-          <a:prstGeom prst="rect">
-            <a:avLst/>
-          </a:prstGeom>
-        </p:spPr>
-      </p:pic>
-      <p:sp>
-        <p:nvSpPr>
-          <p:cNvPr id="11" name="Title 1">
-            <a:extLst>
-              <a:ext uri="{FF2B5EF4-FFF2-40B4-BE49-F238E27FC236}">
-                <a16:creationId xmlns:a16="http://schemas.microsoft.com/office/drawing/2014/main" id="{76B61649-CD9B-7DA6-3446-47B589E40856}"/>
-              </a:ext>
-            </a:extLst>
-          </p:cNvPr>
-          <p:cNvSpPr txBox="1">
-            <a:spLocks/>
-          </p:cNvSpPr>
-          <p:nvPr/>
-        </p:nvSpPr>
-        <p:spPr>
-          <a:xfrm>
-            <a:off x="409928" y="317864"/>
-            <a:ext cx="9189866" cy="838123"/>
-          </a:xfrm>
-          <a:prstGeom prst="rect">
-            <a:avLst/>
-          </a:prstGeom>
-        </p:spPr>
-        <p:txBody>
-          <a:bodyPr vert="horz" lIns="91440" tIns="45720" rIns="91440" bIns="45720" rtlCol="0" anchor="ctr">
-            <a:normAutofit fontScale="70000" lnSpcReduction="20000"/>
-          </a:bodyPr>
-          <a:lstStyle>
-            <a:lvl1pPr algn="l" defTabSz="914400" rtl="0" eaLnBrk="1" latinLnBrk="0" hangingPunct="1">
-              <a:lnSpc>
-                <a:spcPct val="90000"/>
-              </a:lnSpc>
-              <a:spcBef>
-                <a:spcPct val="0"/>
-              </a:spcBef>
-              <a:buNone/>
-              <a:defRPr sz="4400" kern="1200">
-                <a:solidFill>
-                  <a:schemeClr val="tx1"/>
-                </a:solidFill>
-                <a:latin typeface="+mj-lt"/>
-                <a:ea typeface="+mj-ea"/>
-                <a:cs typeface="+mj-cs"/>
-              </a:defRPr>
-            </a:lvl1pPr>
-          </a:lstStyle>
-          <a:p>
-            <a:r>
-              <a:rPr lang="en-US" dirty="0"/>
-              <a:t>Quantum mutuaI information versus Holevo Information</a:t>
-            </a:r>
-          </a:p>
-        </p:txBody>
-      </p:sp>
-      <p:sp>
-        <p:nvSpPr>
-          <p:cNvPr id="12" name="TextBox 11">
-            <a:extLst>
-              <a:ext uri="{FF2B5EF4-FFF2-40B4-BE49-F238E27FC236}">
-                <a16:creationId xmlns:a16="http://schemas.microsoft.com/office/drawing/2014/main" id="{BA36DA20-E925-0285-40A3-34FF87DF3788}"/>
-              </a:ext>
-            </a:extLst>
-          </p:cNvPr>
-          <p:cNvSpPr txBox="1"/>
-          <p:nvPr/>
-        </p:nvSpPr>
-        <p:spPr>
-          <a:xfrm>
-            <a:off x="6702014" y="1123463"/>
-            <a:ext cx="3374706" cy="369332"/>
-          </a:xfrm>
-          <a:prstGeom prst="rect">
-            <a:avLst/>
-          </a:prstGeom>
-          <a:noFill/>
-        </p:spPr>
-        <p:txBody>
-          <a:bodyPr wrap="none" rtlCol="0">
-            <a:spAutoFit/>
-          </a:bodyPr>
-          <a:lstStyle/>
-          <a:p>
-            <a:r>
-              <a:rPr lang="en-VN" dirty="0"/>
-              <a:t>Classical accessibe information</a:t>
-            </a:r>
-          </a:p>
-        </p:txBody>
-      </p:sp>
-      <p:pic>
-        <p:nvPicPr>
-          <p:cNvPr id="13" name="Picture 12">
-            <a:extLst>
-              <a:ext uri="{FF2B5EF4-FFF2-40B4-BE49-F238E27FC236}">
-                <a16:creationId xmlns:a16="http://schemas.microsoft.com/office/drawing/2014/main" id="{EDE9C2A7-B29E-C595-3203-242F3CC66D76}"/>
-              </a:ext>
-            </a:extLst>
-          </p:cNvPr>
-          <p:cNvPicPr>
-            <a:picLocks noChangeAspect="1"/>
-          </p:cNvPicPr>
-          <p:nvPr/>
-        </p:nvPicPr>
-        <p:blipFill>
-          <a:blip r:embed="rId5"/>
-          <a:stretch>
-            <a:fillRect/>
-          </a:stretch>
-        </p:blipFill>
-        <p:spPr>
-          <a:xfrm>
-            <a:off x="6435144" y="2293784"/>
-            <a:ext cx="4249615" cy="3841185"/>
-          </a:xfrm>
-          <a:prstGeom prst="rect">
-            <a:avLst/>
-          </a:prstGeom>
-        </p:spPr>
-      </p:pic>
-    </p:spTree>
-    <p:extLst>
-      <p:ext uri="{BB962C8B-B14F-4D97-AF65-F5344CB8AC3E}">
-        <p14:creationId xmlns:p14="http://schemas.microsoft.com/office/powerpoint/2010/main" val="488009538"/>
-      </p:ext>
-    </p:extLst>
-  </p:cSld>
-  <p:clrMapOvr>
-    <a:masterClrMapping/>
-  </p:clrMapOvr>
-</p:sld>
-</file>
-
-<file path=ppt/slides/slide8.xml><?xml version="1.0" encoding="utf-8"?>
-<p:sld xmlns:a="http://schemas.openxmlformats.org/drawingml/2006/main" xmlns:r="http://schemas.openxmlformats.org/officeDocument/2006/relationships" xmlns:p="http://schemas.openxmlformats.org/presentationml/2006/main">
-  <p:cSld>
-    <p:spTree>
-      <p:nvGrpSpPr>
-        <p:cNvPr id="1" name=""/>
-        <p:cNvGrpSpPr/>
-        <p:nvPr/>
-      </p:nvGrpSpPr>
-      <p:grpSpPr>
-        <a:xfrm>
-          <a:off x="0" y="0"/>
-          <a:ext cx="0" cy="0"/>
-          <a:chOff x="0" y="0"/>
-          <a:chExt cx="0" cy="0"/>
-        </a:xfrm>
-      </p:grpSpPr>
-      <p:pic>
-        <p:nvPicPr>
-          <p:cNvPr id="2" name="Picture 1">
-            <a:extLst>
-              <a:ext uri="{FF2B5EF4-FFF2-40B4-BE49-F238E27FC236}">
-                <a16:creationId xmlns:a16="http://schemas.microsoft.com/office/drawing/2014/main" id="{2DF749F1-7CF6-8FBE-231C-1B67469B6AA8}"/>
-              </a:ext>
-            </a:extLst>
-          </p:cNvPr>
-          <p:cNvPicPr>
-            <a:picLocks noChangeAspect="1"/>
-          </p:cNvPicPr>
-          <p:nvPr/>
-        </p:nvPicPr>
-        <p:blipFill>
-          <a:blip r:embed="rId2"/>
-          <a:stretch>
-            <a:fillRect/>
-          </a:stretch>
-        </p:blipFill>
-        <p:spPr>
-          <a:xfrm>
-            <a:off x="440167" y="1765375"/>
-            <a:ext cx="5029200" cy="4381500"/>
-          </a:xfrm>
-          <a:prstGeom prst="rect">
-            <a:avLst/>
-          </a:prstGeom>
-        </p:spPr>
-      </p:pic>
-      <p:pic>
-        <p:nvPicPr>
-          <p:cNvPr id="3" name="Picture 2">
-            <a:extLst>
-              <a:ext uri="{FF2B5EF4-FFF2-40B4-BE49-F238E27FC236}">
-                <a16:creationId xmlns:a16="http://schemas.microsoft.com/office/drawing/2014/main" id="{12323736-4FE7-A909-0B44-08FE3F56EF39}"/>
-              </a:ext>
-            </a:extLst>
-          </p:cNvPr>
-          <p:cNvPicPr>
-            <a:picLocks noChangeAspect="1"/>
-          </p:cNvPicPr>
-          <p:nvPr/>
-        </p:nvPicPr>
-        <p:blipFill>
-          <a:blip r:embed="rId3"/>
-          <a:stretch>
-            <a:fillRect/>
-          </a:stretch>
-        </p:blipFill>
-        <p:spPr>
-          <a:xfrm>
-            <a:off x="6404382" y="1765374"/>
-            <a:ext cx="4772813" cy="4314099"/>
-          </a:xfrm>
-          <a:prstGeom prst="rect">
-            <a:avLst/>
-          </a:prstGeom>
-        </p:spPr>
-      </p:pic>
-      <p:sp>
-        <p:nvSpPr>
-          <p:cNvPr id="4" name="Title 1">
-            <a:extLst>
-              <a:ext uri="{FF2B5EF4-FFF2-40B4-BE49-F238E27FC236}">
-                <a16:creationId xmlns:a16="http://schemas.microsoft.com/office/drawing/2014/main" id="{419E0C8C-D185-1E87-A1A6-70C640D468B5}"/>
-              </a:ext>
-            </a:extLst>
-          </p:cNvPr>
-          <p:cNvSpPr txBox="1">
-            <a:spLocks/>
-          </p:cNvSpPr>
-          <p:nvPr/>
-        </p:nvSpPr>
-        <p:spPr>
-          <a:xfrm>
-            <a:off x="409928" y="317864"/>
-            <a:ext cx="9189866" cy="838123"/>
-          </a:xfrm>
-          <a:prstGeom prst="rect">
-            <a:avLst/>
-          </a:prstGeom>
-        </p:spPr>
-        <p:txBody>
-          <a:bodyPr vert="horz" lIns="91440" tIns="45720" rIns="91440" bIns="45720" rtlCol="0" anchor="ctr">
-            <a:normAutofit fontScale="70000" lnSpcReduction="20000"/>
-          </a:bodyPr>
-          <a:lstStyle>
-            <a:lvl1pPr algn="l" defTabSz="914400" rtl="0" eaLnBrk="1" latinLnBrk="0" hangingPunct="1">
-              <a:lnSpc>
-                <a:spcPct val="90000"/>
-              </a:lnSpc>
-              <a:spcBef>
-                <a:spcPct val="0"/>
-              </a:spcBef>
-              <a:buNone/>
-              <a:defRPr sz="4400" kern="1200">
-                <a:solidFill>
-                  <a:schemeClr val="tx1"/>
-                </a:solidFill>
-                <a:latin typeface="+mj-lt"/>
-                <a:ea typeface="+mj-ea"/>
-                <a:cs typeface="+mj-cs"/>
-              </a:defRPr>
-            </a:lvl1pPr>
-          </a:lstStyle>
-          <a:p>
-            <a:r>
-              <a:rPr lang="en-US" dirty="0"/>
-              <a:t>Quantum mutuaI information versus Holevo Information</a:t>
-            </a:r>
-          </a:p>
-        </p:txBody>
-      </p:sp>
-    </p:spTree>
-    <p:extLst>
-      <p:ext uri="{BB962C8B-B14F-4D97-AF65-F5344CB8AC3E}">
-        <p14:creationId xmlns:p14="http://schemas.microsoft.com/office/powerpoint/2010/main" val="4182684990"/>
-      </p:ext>
-    </p:extLst>
-  </p:cSld>
-  <p:clrMapOvr>
-    <a:masterClrMapping/>
-  </p:clrMapOvr>
-</p:sld>
-</file>
-
-<file path=ppt/slides/slide9.xml><?xml version="1.0" encoding="utf-8"?>
-<p:sld xmlns:a="http://schemas.openxmlformats.org/drawingml/2006/main" xmlns:r="http://schemas.openxmlformats.org/officeDocument/2006/relationships" xmlns:p="http://schemas.openxmlformats.org/presentationml/2006/main">
-  <p:cSld>
-    <p:spTree>
-      <p:nvGrpSpPr>
-        <p:cNvPr id="1" name=""/>
-        <p:cNvGrpSpPr/>
-        <p:nvPr/>
-      </p:nvGrpSpPr>
-      <p:grpSpPr>
-        <a:xfrm>
-          <a:off x="0" y="0"/>
-          <a:ext cx="0" cy="0"/>
-          <a:chOff x="0" y="0"/>
-          <a:chExt cx="0" cy="0"/>
-        </a:xfrm>
-      </p:grpSpPr>
-      <p:sp>
-        <p:nvSpPr>
-          <p:cNvPr id="4" name="Title 1">
-            <a:extLst>
-              <a:ext uri="{FF2B5EF4-FFF2-40B4-BE49-F238E27FC236}">
-                <a16:creationId xmlns:a16="http://schemas.microsoft.com/office/drawing/2014/main" id="{1E58D96C-60A1-9C79-5D00-A53989E089B6}"/>
-              </a:ext>
-            </a:extLst>
-          </p:cNvPr>
-          <p:cNvSpPr txBox="1">
-            <a:spLocks/>
-          </p:cNvSpPr>
-          <p:nvPr/>
-        </p:nvSpPr>
-        <p:spPr>
-          <a:xfrm>
-            <a:off x="603890" y="1079864"/>
-            <a:ext cx="5270437" cy="838123"/>
-          </a:xfrm>
-          <a:prstGeom prst="rect">
-            <a:avLst/>
-          </a:prstGeom>
-          <a:solidFill>
-            <a:schemeClr val="bg1"/>
-          </a:solidFill>
-        </p:spPr>
-        <p:txBody>
-          <a:bodyPr vert="horz" lIns="91440" tIns="45720" rIns="91440" bIns="45720" rtlCol="0" anchor="ctr">
-            <a:normAutofit/>
-          </a:bodyPr>
-          <a:lstStyle>
-            <a:lvl1pPr algn="l" defTabSz="914400" rtl="0" eaLnBrk="1" latinLnBrk="0" hangingPunct="1">
-              <a:lnSpc>
-                <a:spcPct val="90000"/>
-              </a:lnSpc>
-              <a:spcBef>
-                <a:spcPct val="0"/>
-              </a:spcBef>
-              <a:buNone/>
-              <a:defRPr sz="4400" kern="1200">
-                <a:solidFill>
-                  <a:schemeClr val="tx1"/>
-                </a:solidFill>
-                <a:latin typeface="+mj-lt"/>
-                <a:ea typeface="+mj-ea"/>
-                <a:cs typeface="+mj-cs"/>
-              </a:defRPr>
-            </a:lvl1pPr>
-          </a:lstStyle>
-          <a:p>
-            <a:pPr algn="ctr"/>
-            <a:r>
-              <a:rPr lang="en-US" sz="3600" dirty="0"/>
-              <a:t>Sys + Envir</a:t>
-            </a:r>
-          </a:p>
-        </p:txBody>
-      </p:sp>
-      <p:sp>
-        <p:nvSpPr>
-          <p:cNvPr id="5" name="Title 1">
-            <a:extLst>
-              <a:ext uri="{FF2B5EF4-FFF2-40B4-BE49-F238E27FC236}">
-                <a16:creationId xmlns:a16="http://schemas.microsoft.com/office/drawing/2014/main" id="{0DA2800D-4CDF-ED51-4097-48891953A0F8}"/>
-              </a:ext>
-            </a:extLst>
-          </p:cNvPr>
-          <p:cNvSpPr txBox="1">
-            <a:spLocks/>
-          </p:cNvSpPr>
-          <p:nvPr/>
-        </p:nvSpPr>
-        <p:spPr>
-          <a:xfrm>
-            <a:off x="6501901" y="1079863"/>
-            <a:ext cx="5270437" cy="838123"/>
-          </a:xfrm>
-          <a:prstGeom prst="rect">
-            <a:avLst/>
-          </a:prstGeom>
-          <a:solidFill>
-            <a:schemeClr val="bg1"/>
-          </a:solidFill>
-        </p:spPr>
-        <p:txBody>
-          <a:bodyPr vert="horz" lIns="91440" tIns="45720" rIns="91440" bIns="45720" rtlCol="0" anchor="ctr">
-            <a:normAutofit/>
-          </a:bodyPr>
-          <a:lstStyle>
-            <a:lvl1pPr algn="l" defTabSz="914400" rtl="0" eaLnBrk="1" latinLnBrk="0" hangingPunct="1">
-              <a:lnSpc>
-                <a:spcPct val="90000"/>
-              </a:lnSpc>
-              <a:spcBef>
-                <a:spcPct val="0"/>
-              </a:spcBef>
-              <a:buNone/>
-              <a:defRPr sz="4400" kern="1200">
-                <a:solidFill>
-                  <a:schemeClr val="tx1"/>
-                </a:solidFill>
-                <a:latin typeface="+mj-lt"/>
-                <a:ea typeface="+mj-ea"/>
-                <a:cs typeface="+mj-cs"/>
-              </a:defRPr>
-            </a:lvl1pPr>
-          </a:lstStyle>
-          <a:p>
-            <a:pPr algn="ctr"/>
-            <a:r>
-              <a:rPr lang="en-US" sz="3600" dirty="0"/>
-              <a:t>Sys + Envir +  Obs</a:t>
-            </a:r>
-          </a:p>
-        </p:txBody>
-      </p:sp>
-      <p:sp>
-        <p:nvSpPr>
-          <p:cNvPr id="6" name="Title 1">
-            <a:extLst>
-              <a:ext uri="{FF2B5EF4-FFF2-40B4-BE49-F238E27FC236}">
-                <a16:creationId xmlns:a16="http://schemas.microsoft.com/office/drawing/2014/main" id="{09789B63-F734-1EEE-BDE0-52D12B2FF182}"/>
-              </a:ext>
-            </a:extLst>
-          </p:cNvPr>
-          <p:cNvSpPr txBox="1">
-            <a:spLocks/>
-          </p:cNvSpPr>
-          <p:nvPr/>
-        </p:nvSpPr>
-        <p:spPr>
-          <a:xfrm>
-            <a:off x="409928" y="317864"/>
-            <a:ext cx="11048294" cy="838123"/>
-          </a:xfrm>
-          <a:prstGeom prst="rect">
-            <a:avLst/>
-          </a:prstGeom>
-        </p:spPr>
-        <p:txBody>
-          <a:bodyPr vert="horz" lIns="91440" tIns="45720" rIns="91440" bIns="45720" rtlCol="0" anchor="ctr">
-            <a:normAutofit/>
-          </a:bodyPr>
-          <a:lstStyle>
-            <a:lvl1pPr algn="l" defTabSz="914400" rtl="0" eaLnBrk="1" latinLnBrk="0" hangingPunct="1">
-              <a:lnSpc>
-                <a:spcPct val="90000"/>
-              </a:lnSpc>
-              <a:spcBef>
-                <a:spcPct val="0"/>
-              </a:spcBef>
-              <a:buNone/>
-              <a:defRPr sz="4400" kern="1200">
-                <a:solidFill>
-                  <a:schemeClr val="tx1"/>
-                </a:solidFill>
-                <a:latin typeface="+mj-lt"/>
-                <a:ea typeface="+mj-ea"/>
-                <a:cs typeface="+mj-cs"/>
-              </a:defRPr>
-            </a:lvl1pPr>
-          </a:lstStyle>
-          <a:p>
-            <a:r>
-              <a:rPr lang="en-US" dirty="0"/>
-              <a:t>QMI + Holevo + Discord  comparison</a:t>
-            </a:r>
-          </a:p>
-        </p:txBody>
-      </p:sp>
-    </p:spTree>
-    <p:extLst>
-      <p:ext uri="{BB962C8B-B14F-4D97-AF65-F5344CB8AC3E}">
-        <p14:creationId xmlns:p14="http://schemas.microsoft.com/office/powerpoint/2010/main" val="3161090529"/>
+        <p14:creationId xmlns:p14="http://schemas.microsoft.com/office/powerpoint/2010/main" val="2089002917"/>
       </p:ext>
     </p:extLst>
   </p:cSld>

--- a/Decoherence.pptx
+++ b/Decoherence.pptx
@@ -200,7 +200,7 @@
           <a:p>
             <a:fld id="{AEE9B40D-369A-402D-9A24-2FE29612B8AB}" type="datetimeFigureOut">
               <a:rPr lang="en-GB" smtClean="0"/>
-              <a:t>20/07/2026</a:t>
+              <a:t>03/08/2026</a:t>
             </a:fld>
             <a:endParaRPr lang="en-GB"/>
           </a:p>
@@ -616,7 +616,7 @@
           <a:p>
             <a:fld id="{61CB208B-134F-A247-843F-FB0F3B432007}" type="datetimeFigureOut">
               <a:rPr lang="en-US" smtClean="0"/>
-              <a:t>7/24/26</a:t>
+              <a:t>8/3/2026</a:t>
             </a:fld>
             <a:endParaRPr lang="en-US"/>
           </a:p>
@@ -816,7 +816,7 @@
           <a:p>
             <a:fld id="{61CB208B-134F-A247-843F-FB0F3B432007}" type="datetimeFigureOut">
               <a:rPr lang="en-US" smtClean="0"/>
-              <a:t>7/24/26</a:t>
+              <a:t>8/3/2026</a:t>
             </a:fld>
             <a:endParaRPr lang="en-US"/>
           </a:p>
@@ -1026,7 +1026,7 @@
           <a:p>
             <a:fld id="{61CB208B-134F-A247-843F-FB0F3B432007}" type="datetimeFigureOut">
               <a:rPr lang="en-US" smtClean="0"/>
-              <a:t>7/24/26</a:t>
+              <a:t>8/3/2026</a:t>
             </a:fld>
             <a:endParaRPr lang="en-US"/>
           </a:p>
@@ -1226,7 +1226,7 @@
           <a:p>
             <a:fld id="{61CB208B-134F-A247-843F-FB0F3B432007}" type="datetimeFigureOut">
               <a:rPr lang="en-US" smtClean="0"/>
-              <a:t>7/20/26</a:t>
+              <a:t>8/3/2026</a:t>
             </a:fld>
             <a:endParaRPr lang="en-US"/>
           </a:p>
@@ -1502,7 +1502,7 @@
           <a:p>
             <a:fld id="{61CB208B-134F-A247-843F-FB0F3B432007}" type="datetimeFigureOut">
               <a:rPr lang="en-US" smtClean="0"/>
-              <a:t>7/24/26</a:t>
+              <a:t>8/3/2026</a:t>
             </a:fld>
             <a:endParaRPr lang="en-US"/>
           </a:p>
@@ -1770,7 +1770,7 @@
           <a:p>
             <a:fld id="{61CB208B-134F-A247-843F-FB0F3B432007}" type="datetimeFigureOut">
               <a:rPr lang="en-US" smtClean="0"/>
-              <a:t>7/24/26</a:t>
+              <a:t>8/3/2026</a:t>
             </a:fld>
             <a:endParaRPr lang="en-US"/>
           </a:p>
@@ -2185,7 +2185,7 @@
           <a:p>
             <a:fld id="{61CB208B-134F-A247-843F-FB0F3B432007}" type="datetimeFigureOut">
               <a:rPr lang="en-US" smtClean="0"/>
-              <a:t>7/24/26</a:t>
+              <a:t>8/3/2026</a:t>
             </a:fld>
             <a:endParaRPr lang="en-US"/>
           </a:p>
@@ -2327,7 +2327,7 @@
           <a:p>
             <a:fld id="{61CB208B-134F-A247-843F-FB0F3B432007}" type="datetimeFigureOut">
               <a:rPr lang="en-US" smtClean="0"/>
-              <a:t>7/24/26</a:t>
+              <a:t>8/3/2026</a:t>
             </a:fld>
             <a:endParaRPr lang="en-US"/>
           </a:p>
@@ -2440,7 +2440,7 @@
           <a:p>
             <a:fld id="{61CB208B-134F-A247-843F-FB0F3B432007}" type="datetimeFigureOut">
               <a:rPr lang="en-US" smtClean="0"/>
-              <a:t>7/20/26</a:t>
+              <a:t>8/3/2026</a:t>
             </a:fld>
             <a:endParaRPr lang="en-US"/>
           </a:p>
@@ -2753,7 +2753,7 @@
           <a:p>
             <a:fld id="{61CB208B-134F-A247-843F-FB0F3B432007}" type="datetimeFigureOut">
               <a:rPr lang="en-US" smtClean="0"/>
-              <a:t>7/24/26</a:t>
+              <a:t>8/3/2026</a:t>
             </a:fld>
             <a:endParaRPr lang="en-US"/>
           </a:p>
@@ -3042,7 +3042,7 @@
           <a:p>
             <a:fld id="{61CB208B-134F-A247-843F-FB0F3B432007}" type="datetimeFigureOut">
               <a:rPr lang="en-US" smtClean="0"/>
-              <a:t>7/24/26</a:t>
+              <a:t>8/3/2026</a:t>
             </a:fld>
             <a:endParaRPr lang="en-US"/>
           </a:p>
@@ -3285,7 +3285,7 @@
           <a:p>
             <a:fld id="{61CB208B-134F-A247-843F-FB0F3B432007}" type="datetimeFigureOut">
               <a:rPr lang="en-US" smtClean="0"/>
-              <a:t>7/20/26</a:t>
+              <a:t>8/3/2026</a:t>
             </a:fld>
             <a:endParaRPr lang="en-US"/>
           </a:p>
@@ -3866,7 +3866,7 @@
         </p:nvSpPr>
         <p:spPr>
           <a:xfrm>
-            <a:off x="229338" y="1287335"/>
+            <a:off x="-100436" y="150664"/>
             <a:ext cx="4843592" cy="926648"/>
           </a:xfrm>
           <a:prstGeom prst="rect">
@@ -3934,7 +3934,7 @@
         </p:nvSpPr>
         <p:spPr>
           <a:xfrm>
-            <a:off x="229338" y="2638636"/>
+            <a:off x="85093" y="917317"/>
             <a:ext cx="8858480" cy="2390564"/>
           </a:xfrm>
           <a:prstGeom prst="rect">
@@ -4202,6 +4202,36 @@
           </a:p>
         </p:txBody>
       </p:sp>
+      <p:pic>
+        <p:nvPicPr>
+          <p:cNvPr id="3" name="Picture 2">
+            <a:extLst>
+              <a:ext uri="{FF2B5EF4-FFF2-40B4-BE49-F238E27FC236}">
+                <a16:creationId xmlns:a16="http://schemas.microsoft.com/office/drawing/2014/main" id="{69361AA9-CCFE-3ACF-79B9-AB9C191DD751}"/>
+              </a:ext>
+            </a:extLst>
+          </p:cNvPr>
+          <p:cNvPicPr>
+            <a:picLocks noChangeAspect="1"/>
+          </p:cNvPicPr>
+          <p:nvPr/>
+        </p:nvPicPr>
+        <p:blipFill>
+          <a:blip r:embed="rId6"/>
+          <a:stretch>
+            <a:fillRect/>
+          </a:stretch>
+        </p:blipFill>
+        <p:spPr>
+          <a:xfrm>
+            <a:off x="751289" y="2994990"/>
+            <a:ext cx="3535193" cy="3535193"/>
+          </a:xfrm>
+          <a:prstGeom prst="rect">
+            <a:avLst/>
+          </a:prstGeom>
+        </p:spPr>
+      </p:pic>
     </p:spTree>
     <p:extLst>
       <p:ext uri="{BB962C8B-B14F-4D97-AF65-F5344CB8AC3E}">
@@ -4306,7 +4336,7 @@
         </p:nvSpPr>
         <p:spPr>
           <a:xfrm>
-            <a:off x="341789" y="2079485"/>
+            <a:off x="347292" y="274518"/>
             <a:ext cx="4369443" cy="1077218"/>
           </a:xfrm>
           <a:prstGeom prst="rect">
@@ -4440,7 +4470,7 @@
         </p:nvSpPr>
         <p:spPr>
           <a:xfrm>
-            <a:off x="336286" y="3429000"/>
+            <a:off x="341789" y="1624033"/>
             <a:ext cx="4369443" cy="1432893"/>
           </a:xfrm>
           <a:prstGeom prst="rect">
@@ -4506,6 +4536,36 @@
           </a:p>
         </p:txBody>
       </p:sp>
+      <p:pic>
+        <p:nvPicPr>
+          <p:cNvPr id="4" name="Picture 3">
+            <a:extLst>
+              <a:ext uri="{FF2B5EF4-FFF2-40B4-BE49-F238E27FC236}">
+                <a16:creationId xmlns:a16="http://schemas.microsoft.com/office/drawing/2014/main" id="{F5EB9FF9-9DFB-5115-A573-8C321DE7E073}"/>
+              </a:ext>
+            </a:extLst>
+          </p:cNvPr>
+          <p:cNvPicPr>
+            <a:picLocks noChangeAspect="1"/>
+          </p:cNvPicPr>
+          <p:nvPr/>
+        </p:nvPicPr>
+        <p:blipFill>
+          <a:blip r:embed="rId6"/>
+          <a:stretch>
+            <a:fillRect/>
+          </a:stretch>
+        </p:blipFill>
+        <p:spPr>
+          <a:xfrm>
+            <a:off x="536757" y="3632146"/>
+            <a:ext cx="3979506" cy="2637183"/>
+          </a:xfrm>
+          <a:prstGeom prst="rect">
+            <a:avLst/>
+          </a:prstGeom>
+        </p:spPr>
+      </p:pic>
     </p:spTree>
     <p:extLst>
       <p:ext uri="{BB962C8B-B14F-4D97-AF65-F5344CB8AC3E}">
@@ -4604,6 +4664,36 @@
           </a:p>
         </p:txBody>
       </p:sp>
+      <p:pic>
+        <p:nvPicPr>
+          <p:cNvPr id="13" name="Picture 12">
+            <a:extLst>
+              <a:ext uri="{FF2B5EF4-FFF2-40B4-BE49-F238E27FC236}">
+                <a16:creationId xmlns:a16="http://schemas.microsoft.com/office/drawing/2014/main" id="{85A7203E-4439-F673-4668-D168D15F5339}"/>
+              </a:ext>
+            </a:extLst>
+          </p:cNvPr>
+          <p:cNvPicPr>
+            <a:picLocks noChangeAspect="1"/>
+          </p:cNvPicPr>
+          <p:nvPr/>
+        </p:nvPicPr>
+        <p:blipFill>
+          <a:blip r:embed="rId2"/>
+          <a:stretch>
+            <a:fillRect/>
+          </a:stretch>
+        </p:blipFill>
+        <p:spPr>
+          <a:xfrm>
+            <a:off x="1275897" y="2952587"/>
+            <a:ext cx="3637349" cy="3020849"/>
+          </a:xfrm>
+          <a:prstGeom prst="rect">
+            <a:avLst/>
+          </a:prstGeom>
+        </p:spPr>
+      </p:pic>
     </p:spTree>
     <p:extLst>
       <p:ext uri="{BB962C8B-B14F-4D97-AF65-F5344CB8AC3E}">

--- a/Decoherence.pptx
+++ b/Decoherence.pptx
@@ -200,7 +200,7 @@
           <a:p>
             <a:fld id="{AEE9B40D-369A-402D-9A24-2FE29612B8AB}" type="datetimeFigureOut">
               <a:rPr lang="en-GB" smtClean="0"/>
-              <a:t>03/08/2026</a:t>
+              <a:t>06/08/2026</a:t>
             </a:fld>
             <a:endParaRPr lang="en-GB"/>
           </a:p>
@@ -616,7 +616,7 @@
           <a:p>
             <a:fld id="{61CB208B-134F-A247-843F-FB0F3B432007}" type="datetimeFigureOut">
               <a:rPr lang="en-US" smtClean="0"/>
-              <a:t>8/3/2026</a:t>
+              <a:t>8/6/2026</a:t>
             </a:fld>
             <a:endParaRPr lang="en-US"/>
           </a:p>
@@ -816,7 +816,7 @@
           <a:p>
             <a:fld id="{61CB208B-134F-A247-843F-FB0F3B432007}" type="datetimeFigureOut">
               <a:rPr lang="en-US" smtClean="0"/>
-              <a:t>8/3/2026</a:t>
+              <a:t>8/6/2026</a:t>
             </a:fld>
             <a:endParaRPr lang="en-US"/>
           </a:p>
@@ -1026,7 +1026,7 @@
           <a:p>
             <a:fld id="{61CB208B-134F-A247-843F-FB0F3B432007}" type="datetimeFigureOut">
               <a:rPr lang="en-US" smtClean="0"/>
-              <a:t>8/3/2026</a:t>
+              <a:t>8/6/2026</a:t>
             </a:fld>
             <a:endParaRPr lang="en-US"/>
           </a:p>
@@ -1226,7 +1226,7 @@
           <a:p>
             <a:fld id="{61CB208B-134F-A247-843F-FB0F3B432007}" type="datetimeFigureOut">
               <a:rPr lang="en-US" smtClean="0"/>
-              <a:t>8/3/2026</a:t>
+              <a:t>8/6/2026</a:t>
             </a:fld>
             <a:endParaRPr lang="en-US"/>
           </a:p>
@@ -1502,7 +1502,7 @@
           <a:p>
             <a:fld id="{61CB208B-134F-A247-843F-FB0F3B432007}" type="datetimeFigureOut">
               <a:rPr lang="en-US" smtClean="0"/>
-              <a:t>8/3/2026</a:t>
+              <a:t>8/6/2026</a:t>
             </a:fld>
             <a:endParaRPr lang="en-US"/>
           </a:p>
@@ -1770,7 +1770,7 @@
           <a:p>
             <a:fld id="{61CB208B-134F-A247-843F-FB0F3B432007}" type="datetimeFigureOut">
               <a:rPr lang="en-US" smtClean="0"/>
-              <a:t>8/3/2026</a:t>
+              <a:t>8/6/2026</a:t>
             </a:fld>
             <a:endParaRPr lang="en-US"/>
           </a:p>
@@ -2185,7 +2185,7 @@
           <a:p>
             <a:fld id="{61CB208B-134F-A247-843F-FB0F3B432007}" type="datetimeFigureOut">
               <a:rPr lang="en-US" smtClean="0"/>
-              <a:t>8/3/2026</a:t>
+              <a:t>8/6/2026</a:t>
             </a:fld>
             <a:endParaRPr lang="en-US"/>
           </a:p>
@@ -2327,7 +2327,7 @@
           <a:p>
             <a:fld id="{61CB208B-134F-A247-843F-FB0F3B432007}" type="datetimeFigureOut">
               <a:rPr lang="en-US" smtClean="0"/>
-              <a:t>8/3/2026</a:t>
+              <a:t>8/6/2026</a:t>
             </a:fld>
             <a:endParaRPr lang="en-US"/>
           </a:p>
@@ -2440,7 +2440,7 @@
           <a:p>
             <a:fld id="{61CB208B-134F-A247-843F-FB0F3B432007}" type="datetimeFigureOut">
               <a:rPr lang="en-US" smtClean="0"/>
-              <a:t>8/3/2026</a:t>
+              <a:t>8/6/2026</a:t>
             </a:fld>
             <a:endParaRPr lang="en-US"/>
           </a:p>
@@ -2753,7 +2753,7 @@
           <a:p>
             <a:fld id="{61CB208B-134F-A247-843F-FB0F3B432007}" type="datetimeFigureOut">
               <a:rPr lang="en-US" smtClean="0"/>
-              <a:t>8/3/2026</a:t>
+              <a:t>8/6/2026</a:t>
             </a:fld>
             <a:endParaRPr lang="en-US"/>
           </a:p>
@@ -3042,7 +3042,7 @@
           <a:p>
             <a:fld id="{61CB208B-134F-A247-843F-FB0F3B432007}" type="datetimeFigureOut">
               <a:rPr lang="en-US" smtClean="0"/>
-              <a:t>8/3/2026</a:t>
+              <a:t>8/6/2026</a:t>
             </a:fld>
             <a:endParaRPr lang="en-US"/>
           </a:p>
@@ -3285,7 +3285,7 @@
           <a:p>
             <a:fld id="{61CB208B-134F-A247-843F-FB0F3B432007}" type="datetimeFigureOut">
               <a:rPr lang="en-US" smtClean="0"/>
-              <a:t>8/3/2026</a:t>
+              <a:t>8/6/2026</a:t>
             </a:fld>
             <a:endParaRPr lang="en-US"/>
           </a:p>
@@ -4264,10 +4264,10 @@
       </p:grpSpPr>
       <p:pic>
         <p:nvPicPr>
-          <p:cNvPr id="5" name="Picture 4">
-            <a:extLst>
-              <a:ext uri="{FF2B5EF4-FFF2-40B4-BE49-F238E27FC236}">
-                <a16:creationId xmlns:a16="http://schemas.microsoft.com/office/drawing/2014/main" id="{C161C424-9C27-B8F8-9A43-389B5D7D9284}"/>
+          <p:cNvPr id="8" name="Picture 7">
+            <a:extLst>
+              <a:ext uri="{FF2B5EF4-FFF2-40B4-BE49-F238E27FC236}">
+                <a16:creationId xmlns:a16="http://schemas.microsoft.com/office/drawing/2014/main" id="{497C2F7E-CC07-DFD3-5EBD-03EDB2DE7D58}"/>
               </a:ext>
             </a:extLst>
           </p:cNvPr>
@@ -4284,20 +4284,191 @@
         </p:blipFill>
         <p:spPr>
           <a:xfrm>
-            <a:off x="7726768" y="360000"/>
-            <a:ext cx="3467756" cy="2880000"/>
+            <a:off x="8554570" y="588671"/>
+            <a:ext cx="3136757" cy="2605103"/>
           </a:xfrm>
           <a:prstGeom prst="rect">
             <a:avLst/>
           </a:prstGeom>
         </p:spPr>
       </p:pic>
+      <p:sp>
+        <p:nvSpPr>
+          <p:cNvPr id="9" name="TextBox 8">
+            <a:extLst>
+              <a:ext uri="{FF2B5EF4-FFF2-40B4-BE49-F238E27FC236}">
+                <a16:creationId xmlns:a16="http://schemas.microsoft.com/office/drawing/2014/main" id="{3C00E6D1-FA2A-6FD2-7C3A-72DCA0D37AF1}"/>
+              </a:ext>
+            </a:extLst>
+          </p:cNvPr>
+          <p:cNvSpPr txBox="1"/>
+          <p:nvPr/>
+        </p:nvSpPr>
+        <p:spPr>
+          <a:xfrm>
+            <a:off x="347292" y="274518"/>
+            <a:ext cx="4369443" cy="1077218"/>
+          </a:xfrm>
+          <a:prstGeom prst="rect">
+            <a:avLst/>
+          </a:prstGeom>
+          <a:noFill/>
+        </p:spPr>
+        <p:txBody>
+          <a:bodyPr wrap="square">
+            <a:spAutoFit/>
+          </a:bodyPr>
+          <a:lstStyle/>
+          <a:p>
+            <a:pPr algn="ctr"/>
+            <a:r>
+              <a:rPr lang="en-US" sz="3200" b="1" dirty="0">
+                <a:latin typeface="Arial" panose="020B0604020202020204" pitchFamily="34" charset="0"/>
+                <a:cs typeface="Arial" panose="020B0604020202020204" pitchFamily="34" charset="0"/>
+              </a:rPr>
+              <a:t>Modified scenario: Sys + Obs + Envir</a:t>
+            </a:r>
+          </a:p>
+        </p:txBody>
+      </p:sp>
+      <p:sp>
+        <p:nvSpPr>
+          <p:cNvPr id="22" name="TextBox 21">
+            <a:extLst>
+              <a:ext uri="{FF2B5EF4-FFF2-40B4-BE49-F238E27FC236}">
+                <a16:creationId xmlns:a16="http://schemas.microsoft.com/office/drawing/2014/main" id="{03BBCD6A-54F6-209E-CEFC-5830B62F3417}"/>
+              </a:ext>
+            </a:extLst>
+          </p:cNvPr>
+          <p:cNvSpPr txBox="1"/>
+          <p:nvPr/>
+        </p:nvSpPr>
+        <p:spPr>
+          <a:xfrm>
+            <a:off x="9799983" y="2155813"/>
+            <a:ext cx="1656521" cy="369332"/>
+          </a:xfrm>
+          <a:prstGeom prst="rect">
+            <a:avLst/>
+          </a:prstGeom>
+          <a:noFill/>
+        </p:spPr>
+        <p:txBody>
+          <a:bodyPr wrap="square">
+            <a:spAutoFit/>
+          </a:bodyPr>
+          <a:lstStyle/>
+          <a:p>
+            <a:r>
+              <a:rPr lang="en-US" dirty="0"/>
+              <a:t>RY(phi)</a:t>
+            </a:r>
+            <a:r>
+              <a:rPr lang="en-VN" dirty="0"/>
+              <a:t> </a:t>
+            </a:r>
+            <a:r>
+              <a:rPr lang="en-US" dirty="0"/>
+              <a:t>= </a:t>
+            </a:r>
+            <a:r>
+              <a:rPr lang="en-VN" dirty="0"/>
+              <a:t>π</a:t>
+            </a:r>
+            <a:r>
+              <a:rPr lang="en-US" dirty="0"/>
+              <a:t>/2</a:t>
+            </a:r>
+            <a:endParaRPr lang="en-VN" dirty="0"/>
+          </a:p>
+        </p:txBody>
+      </p:sp>
+      <p:sp>
+        <p:nvSpPr>
+          <p:cNvPr id="25" name="TextBox 24">
+            <a:extLst>
+              <a:ext uri="{FF2B5EF4-FFF2-40B4-BE49-F238E27FC236}">
+                <a16:creationId xmlns:a16="http://schemas.microsoft.com/office/drawing/2014/main" id="{B439C357-18F7-F249-C0A7-88E3A04E2909}"/>
+              </a:ext>
+            </a:extLst>
+          </p:cNvPr>
+          <p:cNvSpPr txBox="1"/>
+          <p:nvPr/>
+        </p:nvSpPr>
+        <p:spPr>
+          <a:xfrm>
+            <a:off x="341789" y="1624033"/>
+            <a:ext cx="4369443" cy="1432893"/>
+          </a:xfrm>
+          <a:prstGeom prst="rect">
+            <a:avLst/>
+          </a:prstGeom>
+          <a:noFill/>
+        </p:spPr>
+        <p:txBody>
+          <a:bodyPr wrap="square">
+            <a:spAutoFit/>
+          </a:bodyPr>
+          <a:lstStyle/>
+          <a:p>
+            <a:pPr marL="457200" indent="-457200">
+              <a:lnSpc>
+                <a:spcPct val="150000"/>
+              </a:lnSpc>
+              <a:buFont typeface="Arial" panose="020B0604020202020204" pitchFamily="34" charset="0"/>
+              <a:buChar char="•"/>
+            </a:pPr>
+            <a:r>
+              <a:rPr lang="en-VN" sz="2000" b="1" dirty="0"/>
+              <a:t>Sys-obs interaction: </a:t>
+            </a:r>
+            <a:r>
+              <a:rPr lang="en-VN" sz="2000" dirty="0"/>
+              <a:t>CZ gate</a:t>
+            </a:r>
+          </a:p>
+          <a:p>
+            <a:pPr marL="457200" indent="-457200">
+              <a:lnSpc>
+                <a:spcPct val="150000"/>
+              </a:lnSpc>
+              <a:buFont typeface="Arial" panose="020B0604020202020204" pitchFamily="34" charset="0"/>
+              <a:buChar char="•"/>
+            </a:pPr>
+            <a:r>
+              <a:rPr lang="en-VN" sz="2000" b="1" dirty="0"/>
+              <a:t>Obs-envir interaction: </a:t>
+            </a:r>
+            <a:r>
+              <a:rPr lang="en-VN" sz="2000" dirty="0"/>
+              <a:t>U3 gate</a:t>
+            </a:r>
+          </a:p>
+          <a:p>
+            <a:pPr marL="457200" indent="-457200">
+              <a:lnSpc>
+                <a:spcPct val="150000"/>
+              </a:lnSpc>
+              <a:buFont typeface="Arial" panose="020B0604020202020204" pitchFamily="34" charset="0"/>
+              <a:buChar char="•"/>
+            </a:pPr>
+            <a:r>
+              <a:rPr lang="en-VN" sz="2000" b="1" dirty="0"/>
+              <a:t>3D simulation: </a:t>
+            </a:r>
+            <a:r>
+              <a:rPr lang="en-VN" sz="2000" dirty="0"/>
+              <a:t>varying θ</a:t>
+            </a:r>
+          </a:p>
+        </p:txBody>
+      </p:sp>
       <p:pic>
         <p:nvPicPr>
-          <p:cNvPr id="6" name="Picture 5">
-            <a:extLst>
-              <a:ext uri="{FF2B5EF4-FFF2-40B4-BE49-F238E27FC236}">
-                <a16:creationId xmlns:a16="http://schemas.microsoft.com/office/drawing/2014/main" id="{3F21D931-3E34-E06F-6EF0-C3857A2A3675}"/>
+          <p:cNvPr id="11" name="Picture 10">
+            <a:extLst>
+              <a:ext uri="{FF2B5EF4-FFF2-40B4-BE49-F238E27FC236}">
+                <a16:creationId xmlns:a16="http://schemas.microsoft.com/office/drawing/2014/main" id="{0A8354DC-8A99-103E-FBFE-179A922E7216}"/>
               </a:ext>
             </a:extLst>
           </p:cNvPr>
@@ -4314,94 +4485,20 @@
         </p:blipFill>
         <p:spPr>
           <a:xfrm>
-            <a:off x="4711232" y="189000"/>
-            <a:ext cx="3170025" cy="2884406"/>
+            <a:off x="5041305" y="274518"/>
+            <a:ext cx="3400329" cy="2865297"/>
           </a:xfrm>
           <a:prstGeom prst="rect">
             <a:avLst/>
           </a:prstGeom>
         </p:spPr>
       </p:pic>
-      <p:sp>
-        <p:nvSpPr>
-          <p:cNvPr id="9" name="TextBox 8">
-            <a:extLst>
-              <a:ext uri="{FF2B5EF4-FFF2-40B4-BE49-F238E27FC236}">
-                <a16:creationId xmlns:a16="http://schemas.microsoft.com/office/drawing/2014/main" id="{3C00E6D1-FA2A-6FD2-7C3A-72DCA0D37AF1}"/>
-              </a:ext>
-            </a:extLst>
-          </p:cNvPr>
-          <p:cNvSpPr txBox="1"/>
-          <p:nvPr/>
-        </p:nvSpPr>
-        <p:spPr>
-          <a:xfrm>
-            <a:off x="347292" y="274518"/>
-            <a:ext cx="4369443" cy="1077218"/>
-          </a:xfrm>
-          <a:prstGeom prst="rect">
-            <a:avLst/>
-          </a:prstGeom>
-          <a:noFill/>
-        </p:spPr>
-        <p:txBody>
-          <a:bodyPr wrap="square">
-            <a:spAutoFit/>
-          </a:bodyPr>
-          <a:lstStyle/>
-          <a:p>
-            <a:pPr algn="ctr"/>
-            <a:r>
-              <a:rPr lang="en-US" sz="3200" b="1" dirty="0">
-                <a:latin typeface="Arial" panose="020B0604020202020204" pitchFamily="34" charset="0"/>
-                <a:cs typeface="Arial" panose="020B0604020202020204" pitchFamily="34" charset="0"/>
-              </a:rPr>
-              <a:t>Modified scenario: Sys + Obs + Envir</a:t>
-            </a:r>
-          </a:p>
-        </p:txBody>
-      </p:sp>
-      <p:sp>
-        <p:nvSpPr>
-          <p:cNvPr id="22" name="TextBox 21">
-            <a:extLst>
-              <a:ext uri="{FF2B5EF4-FFF2-40B4-BE49-F238E27FC236}">
-                <a16:creationId xmlns:a16="http://schemas.microsoft.com/office/drawing/2014/main" id="{03BBCD6A-54F6-209E-CEFC-5830B62F3417}"/>
-              </a:ext>
-            </a:extLst>
-          </p:cNvPr>
-          <p:cNvSpPr txBox="1"/>
-          <p:nvPr/>
-        </p:nvSpPr>
-        <p:spPr>
-          <a:xfrm>
-            <a:off x="9948110" y="1123745"/>
-            <a:ext cx="1046462" cy="369332"/>
-          </a:xfrm>
-          <a:prstGeom prst="rect">
-            <a:avLst/>
-          </a:prstGeom>
-          <a:noFill/>
-        </p:spPr>
-        <p:txBody>
-          <a:bodyPr wrap="square">
-            <a:spAutoFit/>
-          </a:bodyPr>
-          <a:lstStyle/>
-          <a:p>
-            <a:r>
-              <a:rPr lang="en-VN" dirty="0"/>
-              <a:t>θ = π</a:t>
-            </a:r>
-          </a:p>
-        </p:txBody>
-      </p:sp>
       <p:pic>
         <p:nvPicPr>
-          <p:cNvPr id="23" name="Picture 22">
-            <a:extLst>
-              <a:ext uri="{FF2B5EF4-FFF2-40B4-BE49-F238E27FC236}">
-                <a16:creationId xmlns:a16="http://schemas.microsoft.com/office/drawing/2014/main" id="{D2ADE3AC-EEC9-8BA6-F934-690E565501C2}"/>
+          <p:cNvPr id="13" name="Picture 12">
+            <a:extLst>
+              <a:ext uri="{FF2B5EF4-FFF2-40B4-BE49-F238E27FC236}">
+                <a16:creationId xmlns:a16="http://schemas.microsoft.com/office/drawing/2014/main" id="{4B5C8242-92AB-275B-0C6A-3404341711E4}"/>
               </a:ext>
             </a:extLst>
           </p:cNvPr>
@@ -4418,8 +4515,8 @@
         </p:blipFill>
         <p:spPr>
           <a:xfrm>
-            <a:off x="8455232" y="3389329"/>
-            <a:ext cx="3400482" cy="2880000"/>
+            <a:off x="6755251" y="3303105"/>
+            <a:ext cx="3954399" cy="3440565"/>
           </a:xfrm>
           <a:prstGeom prst="rect">
             <a:avLst/>
@@ -4428,10 +4525,10 @@
       </p:pic>
       <p:pic>
         <p:nvPicPr>
-          <p:cNvPr id="24" name="Picture 23">
-            <a:extLst>
-              <a:ext uri="{FF2B5EF4-FFF2-40B4-BE49-F238E27FC236}">
-                <a16:creationId xmlns:a16="http://schemas.microsoft.com/office/drawing/2014/main" id="{807AF7BC-724B-5F35-3DA2-CCC675BAFF62}"/>
+          <p:cNvPr id="15" name="Picture 14">
+            <a:extLst>
+              <a:ext uri="{FF2B5EF4-FFF2-40B4-BE49-F238E27FC236}">
+                <a16:creationId xmlns:a16="http://schemas.microsoft.com/office/drawing/2014/main" id="{C86E6829-3AF8-3391-759E-AD94AB5CC932}"/>
               </a:ext>
             </a:extLst>
           </p:cNvPr>
@@ -4448,118 +4545,8 @@
         </p:blipFill>
         <p:spPr>
           <a:xfrm>
-            <a:off x="4711232" y="3389329"/>
-            <a:ext cx="3744000" cy="2880000"/>
-          </a:xfrm>
-          <a:prstGeom prst="rect">
-            <a:avLst/>
-          </a:prstGeom>
-        </p:spPr>
-      </p:pic>
-      <p:sp>
-        <p:nvSpPr>
-          <p:cNvPr id="25" name="TextBox 24">
-            <a:extLst>
-              <a:ext uri="{FF2B5EF4-FFF2-40B4-BE49-F238E27FC236}">
-                <a16:creationId xmlns:a16="http://schemas.microsoft.com/office/drawing/2014/main" id="{B439C357-18F7-F249-C0A7-88E3A04E2909}"/>
-              </a:ext>
-            </a:extLst>
-          </p:cNvPr>
-          <p:cNvSpPr txBox="1"/>
-          <p:nvPr/>
-        </p:nvSpPr>
-        <p:spPr>
-          <a:xfrm>
-            <a:off x="341789" y="1624033"/>
-            <a:ext cx="4369443" cy="1432893"/>
-          </a:xfrm>
-          <a:prstGeom prst="rect">
-            <a:avLst/>
-          </a:prstGeom>
-          <a:noFill/>
-        </p:spPr>
-        <p:txBody>
-          <a:bodyPr wrap="square">
-            <a:spAutoFit/>
-          </a:bodyPr>
-          <a:lstStyle/>
-          <a:p>
-            <a:pPr marL="457200" indent="-457200">
-              <a:lnSpc>
-                <a:spcPct val="150000"/>
-              </a:lnSpc>
-              <a:buFont typeface="Arial" panose="020B0604020202020204" pitchFamily="34" charset="0"/>
-              <a:buChar char="•"/>
-            </a:pPr>
-            <a:r>
-              <a:rPr lang="en-VN" sz="2000" b="1" dirty="0"/>
-              <a:t>Sys-obs interaction: </a:t>
-            </a:r>
-            <a:r>
-              <a:rPr lang="en-VN" sz="2000" dirty="0"/>
-              <a:t>CZ gate</a:t>
-            </a:r>
-          </a:p>
-          <a:p>
-            <a:pPr marL="457200" indent="-457200">
-              <a:lnSpc>
-                <a:spcPct val="150000"/>
-              </a:lnSpc>
-              <a:buFont typeface="Arial" panose="020B0604020202020204" pitchFamily="34" charset="0"/>
-              <a:buChar char="•"/>
-            </a:pPr>
-            <a:r>
-              <a:rPr lang="en-VN" sz="2000" b="1" dirty="0"/>
-              <a:t>Obs-envir interaction: </a:t>
-            </a:r>
-            <a:r>
-              <a:rPr lang="en-VN" sz="2000" dirty="0"/>
-              <a:t>U3 gate</a:t>
-            </a:r>
-          </a:p>
-          <a:p>
-            <a:pPr marL="457200" indent="-457200">
-              <a:lnSpc>
-                <a:spcPct val="150000"/>
-              </a:lnSpc>
-              <a:buFont typeface="Arial" panose="020B0604020202020204" pitchFamily="34" charset="0"/>
-              <a:buChar char="•"/>
-            </a:pPr>
-            <a:r>
-              <a:rPr lang="en-VN" sz="2000" b="1" dirty="0"/>
-              <a:t>3D simulation: </a:t>
-            </a:r>
-            <a:r>
-              <a:rPr lang="en-VN" sz="2000" dirty="0"/>
-              <a:t>varying θ</a:t>
-            </a:r>
-          </a:p>
-        </p:txBody>
-      </p:sp>
-      <p:pic>
-        <p:nvPicPr>
-          <p:cNvPr id="4" name="Picture 3">
-            <a:extLst>
-              <a:ext uri="{FF2B5EF4-FFF2-40B4-BE49-F238E27FC236}">
-                <a16:creationId xmlns:a16="http://schemas.microsoft.com/office/drawing/2014/main" id="{F5EB9FF9-9DFB-5115-A573-8C321DE7E073}"/>
-              </a:ext>
-            </a:extLst>
-          </p:cNvPr>
-          <p:cNvPicPr>
-            <a:picLocks noChangeAspect="1"/>
-          </p:cNvPicPr>
-          <p:nvPr/>
-        </p:nvPicPr>
-        <p:blipFill>
-          <a:blip r:embed="rId6"/>
-          <a:stretch>
-            <a:fillRect/>
-          </a:stretch>
-        </p:blipFill>
-        <p:spPr>
-          <a:xfrm>
-            <a:off x="536757" y="3632146"/>
-            <a:ext cx="3979506" cy="2637183"/>
+            <a:off x="408050" y="3193774"/>
+            <a:ext cx="4939386" cy="3273287"/>
           </a:xfrm>
           <a:prstGeom prst="rect">
             <a:avLst/>
